--- a/Team_VisualAnalytics_SmartEnergy_PowerBI_v3.pptx
+++ b/Team_VisualAnalytics_SmartEnergy_PowerBI_v3.pptx
@@ -21,6 +21,8 @@
     <p:sldId id="269" r:id="rId20"/>
     <p:sldId id="270" r:id="rId21"/>
     <p:sldId id="271" r:id="rId22"/>
+    <p:sldId id="272" r:id="rId23"/>
+    <p:sldId id="273" r:id="rId24"/>
   </p:sldIdLst>
   <p:sldSz cx="12191695" cy="6858000" type="screen4x3"/>
   <p:notesSz cx="6858000" cy="9144000"/>
@@ -3199,8 +3201,8 @@
         </p:nvSpPr>
         <p:spPr>
           <a:xfrm>
-            <a:off x="0" y="6583680"/>
-            <a:ext cx="12191695" cy="274320"/>
+            <a:off x="0" y="6537960"/>
+            <a:ext cx="12191695" cy="320040"/>
           </a:xfrm>
           <a:prstGeom prst="rect">
             <a:avLst/>
@@ -3266,13 +3268,13 @@
               </a:spcAft>
             </a:pPr>
             <a:r>
-              <a:rPr sz="1200" b="1" i="0">
+              <a:rPr sz="1100" b="1" i="0">
                 <a:solidFill>
                   <a:srgbClr val="6FA3FF"/>
                 </a:solidFill>
                 <a:latin typeface="Segoe UI"/>
               </a:rPr>
-              <a:t>MACSE603 - VISUAL ANALYTICS LAB</a:t>
+              <a:t>MACSE603 - VISUAL ANALYTICS LAB  |  SLOT: VL2026270106590 (PRP135)  |  FALL SEMESTER 2026</a:t>
             </a:r>
           </a:p>
         </p:txBody>
@@ -3285,8 +3287,8 @@
         </p:nvSpPr>
         <p:spPr>
           <a:xfrm>
-            <a:off x="777240" y="1051560"/>
-            <a:ext cx="10607040" cy="320040"/>
+            <a:off x="777240" y="777240"/>
+            <a:ext cx="10607040" cy="274320"/>
           </a:xfrm>
           <a:prstGeom prst="rect">
             <a:avLst/>
@@ -3308,13 +3310,13 @@
               </a:spcAft>
             </a:pPr>
             <a:r>
-              <a:rPr sz="1250" b="1" i="0">
+              <a:rPr sz="1200" b="1" i="0">
                 <a:solidFill>
                   <a:srgbClr val="3366CC"/>
                 </a:solidFill>
                 <a:latin typeface="Segoe UI"/>
               </a:rPr>
-              <a:t>ACADEMIC FINAL PROJECT DEFENSE</a:t>
+              <a:t>ACADEMIC FINAL CAPSTONE PROJECT DEFENSE</a:t>
             </a:r>
           </a:p>
         </p:txBody>
@@ -3327,8 +3329,8 @@
         </p:nvSpPr>
         <p:spPr>
           <a:xfrm>
-            <a:off x="777240" y="1536192"/>
-            <a:ext cx="10607040" cy="1828800"/>
+            <a:off x="777240" y="1143000"/>
+            <a:ext cx="10607040" cy="1645920"/>
           </a:xfrm>
           <a:prstGeom prst="rect">
             <a:avLst/>
@@ -3350,7 +3352,7 @@
               </a:spcAft>
             </a:pPr>
             <a:r>
-              <a:rPr sz="3800" b="1" i="0">
+              <a:rPr sz="3400" b="1" i="0">
                 <a:solidFill>
                   <a:srgbClr val="10245C"/>
                 </a:solidFill>
@@ -3369,7 +3371,7 @@
               </a:spcAft>
             </a:pPr>
             <a:r>
-              <a:rPr sz="3800" b="1" i="0">
+              <a:rPr sz="3400" b="1" i="0">
                 <a:solidFill>
                   <a:srgbClr val="10245C"/>
                 </a:solidFill>
@@ -3388,7 +3390,7 @@
               </a:spcAft>
             </a:pPr>
             <a:r>
-              <a:rPr sz="3800" b="1" i="0">
+              <a:rPr sz="3400" b="1" i="0">
                 <a:solidFill>
                   <a:srgbClr val="3366CC"/>
                 </a:solidFill>
@@ -3407,8 +3409,8 @@
         </p:nvSpPr>
         <p:spPr>
           <a:xfrm>
-            <a:off x="777240" y="3584448"/>
-            <a:ext cx="1280160" cy="45720"/>
+            <a:off x="777240" y="2999232"/>
+            <a:ext cx="1280160" cy="36576"/>
           </a:xfrm>
           <a:prstGeom prst="rect">
             <a:avLst/>
@@ -3445,56 +3447,14 @@
       </p:sp>
       <p:sp>
         <p:nvSpPr>
-          <p:cNvPr id="9" name="TextBox 8"/>
-          <p:cNvSpPr txBox="1"/>
-          <p:nvPr/>
-        </p:nvSpPr>
-        <p:spPr>
-          <a:xfrm>
-            <a:off x="777240" y="3840480"/>
-            <a:ext cx="10607040" cy="292608"/>
-          </a:xfrm>
-          <a:prstGeom prst="rect">
-            <a:avLst/>
-          </a:prstGeom>
-          <a:noFill/>
-        </p:spPr>
-        <p:txBody>
-          <a:bodyPr wrap="square" lIns="0" rIns="0" tIns="0" bIns="0">
-            <a:spAutoFit/>
-          </a:bodyPr>
-          <a:lstStyle/>
-          <a:p>
-            <a:pPr algn="l">
-              <a:lnSpc>
-                <a:spcPct val="115000"/>
-              </a:lnSpc>
-              <a:spcAft>
-                <a:spcPts val="600"/>
-              </a:spcAft>
-            </a:pPr>
-            <a:r>
-              <a:rPr sz="1150" b="1" i="0">
-                <a:solidFill>
-                  <a:srgbClr val="555555"/>
-                </a:solidFill>
-                <a:latin typeface="Segoe UI"/>
-              </a:rPr>
-              <a:t>PROJECT TEAM MEMBERS</a:t>
-            </a:r>
-          </a:p>
-        </p:txBody>
-      </p:sp>
-      <p:sp>
-        <p:nvSpPr>
-          <p:cNvPr id="10" name="Rectangle 9"/>
+          <p:cNvPr id="9" name="Rectangle 8"/>
           <p:cNvSpPr/>
           <p:nvPr/>
         </p:nvSpPr>
         <p:spPr>
           <a:xfrm>
-            <a:off x="777240" y="4251960"/>
-            <a:ext cx="3401568" cy="1371600"/>
+            <a:off x="777240" y="3154680"/>
+            <a:ext cx="10634472" cy="749808"/>
           </a:xfrm>
           <a:prstGeom prst="rect">
             <a:avLst/>
@@ -3533,20 +3493,20 @@
       </p:sp>
       <p:sp>
         <p:nvSpPr>
-          <p:cNvPr id="11" name="Rectangle 10"/>
+          <p:cNvPr id="10" name="Rectangle 9"/>
           <p:cNvSpPr/>
           <p:nvPr/>
         </p:nvSpPr>
         <p:spPr>
           <a:xfrm>
-            <a:off x="777240" y="4251960"/>
-            <a:ext cx="3401568" cy="64008"/>
+            <a:off x="777240" y="3154680"/>
+            <a:ext cx="64008" cy="749808"/>
           </a:xfrm>
           <a:prstGeom prst="rect">
             <a:avLst/>
           </a:prstGeom>
           <a:solidFill>
-            <a:srgbClr val="3366CC"/>
+            <a:srgbClr val="10245C"/>
           </a:solidFill>
           <a:ln>
             <a:noFill/>
@@ -3577,14 +3537,14 @@
       </p:sp>
       <p:sp>
         <p:nvSpPr>
-          <p:cNvPr id="12" name="TextBox 11"/>
+          <p:cNvPr id="11" name="TextBox 10"/>
           <p:cNvSpPr txBox="1"/>
           <p:nvPr/>
         </p:nvSpPr>
         <p:spPr>
           <a:xfrm>
-            <a:off x="1051560" y="4480560"/>
-            <a:ext cx="2880360" cy="1005840"/>
+            <a:off x="1005840" y="3218688"/>
+            <a:ext cx="10241280" cy="640080"/>
           </a:xfrm>
           <a:prstGeom prst="rect">
             <a:avLst/>
@@ -3602,17 +3562,36 @@
                 <a:spcPct val="115000"/>
               </a:lnSpc>
               <a:spcAft>
-                <a:spcPts val="400"/>
-              </a:spcAft>
-            </a:pPr>
-            <a:r>
-              <a:rPr sz="1650" b="1" i="0">
+                <a:spcPts val="600"/>
+              </a:spcAft>
+            </a:pPr>
+            <a:r>
+              <a:rPr sz="950" b="1" i="0">
+                <a:solidFill>
+                  <a:srgbClr val="555555"/>
+                </a:solidFill>
+                <a:latin typeface="Segoe UI"/>
+              </a:rPr>
+              <a:t>SUBMITTED TO / EVALUATOR:</a:t>
+            </a:r>
+          </a:p>
+          <a:p>
+            <a:pPr algn="l">
+              <a:lnSpc>
+                <a:spcPct val="115000"/>
+              </a:lnSpc>
+              <a:spcAft>
+                <a:spcPts val="600"/>
+              </a:spcAft>
+            </a:pPr>
+            <a:r>
+              <a:rPr sz="1200" b="1" i="0">
                 <a:solidFill>
                   <a:srgbClr val="10245C"/>
                 </a:solidFill>
                 <a:latin typeface="Segoe UI"/>
               </a:rPr>
-              <a:t>Vedant Nimkar</a:t>
+              <a:t>Dr. Mary Jennifer J  |  Assistant Professor (Senior), School of Social Sciences &amp; Languages (SSL) / Evaluator</a:t>
             </a:r>
           </a:p>
           <a:p>
@@ -3625,15 +3604,38 @@
               </a:spcAft>
             </a:pPr>
             <a:r>
-              <a:rPr sz="1200" b="0" i="0">
+              <a:rPr sz="1000" b="0" i="0">
                 <a:solidFill>
                   <a:srgbClr val="555555"/>
                 </a:solidFill>
                 <a:latin typeface="Segoe UI"/>
               </a:rPr>
-              <a:t>Reg. No. 26MML0045</a:t>
-            </a:r>
-          </a:p>
+              <a:t>School of Computer Science and Engineering (SCOPE), Vellore Institute of Technology, Vellore - 632014</a:t>
+            </a:r>
+          </a:p>
+        </p:txBody>
+      </p:sp>
+      <p:sp>
+        <p:nvSpPr>
+          <p:cNvPr id="12" name="TextBox 11"/>
+          <p:cNvSpPr txBox="1"/>
+          <p:nvPr/>
+        </p:nvSpPr>
+        <p:spPr>
+          <a:xfrm>
+            <a:off x="777240" y="4005072"/>
+            <a:ext cx="10607040" cy="256032"/>
+          </a:xfrm>
+          <a:prstGeom prst="rect">
+            <a:avLst/>
+          </a:prstGeom>
+          <a:noFill/>
+        </p:spPr>
+        <p:txBody>
+          <a:bodyPr wrap="square" lIns="0" rIns="0" tIns="0" bIns="0">
+            <a:spAutoFit/>
+          </a:bodyPr>
+          <a:lstStyle/>
           <a:p>
             <a:pPr algn="l">
               <a:lnSpc>
@@ -3644,13 +3646,13 @@
               </a:spcAft>
             </a:pPr>
             <a:r>
-              <a:rPr sz="950" b="1" i="0">
-                <a:solidFill>
-                  <a:srgbClr val="1E7A4F"/>
-                </a:solidFill>
-                <a:latin typeface="Segoe UI"/>
-              </a:rPr>
-              <a:t>TEAM LEADER</a:t>
+              <a:rPr sz="1050" b="1" i="0">
+                <a:solidFill>
+                  <a:srgbClr val="555555"/>
+                </a:solidFill>
+                <a:latin typeface="Segoe UI"/>
+              </a:rPr>
+              <a:t>SUBMITTED BY: PROJECT TEAM MEMBERS</a:t>
             </a:r>
           </a:p>
         </p:txBody>
@@ -3663,8 +3665,8 @@
         </p:nvSpPr>
         <p:spPr>
           <a:xfrm>
-            <a:off x="4407408" y="4251960"/>
-            <a:ext cx="3401568" cy="1371600"/>
+            <a:off x="777240" y="4297680"/>
+            <a:ext cx="3401568" cy="1325880"/>
           </a:xfrm>
           <a:prstGeom prst="rect">
             <a:avLst/>
@@ -3709,14 +3711,14 @@
         </p:nvSpPr>
         <p:spPr>
           <a:xfrm>
-            <a:off x="4407408" y="4251960"/>
+            <a:off x="777240" y="4297680"/>
             <a:ext cx="3401568" cy="64008"/>
           </a:xfrm>
           <a:prstGeom prst="rect">
             <a:avLst/>
           </a:prstGeom>
           <a:solidFill>
-            <a:srgbClr val="3366CC"/>
+            <a:srgbClr val="1E7A4F"/>
           </a:solidFill>
           <a:ln>
             <a:noFill/>
@@ -3753,8 +3755,8 @@
         </p:nvSpPr>
         <p:spPr>
           <a:xfrm>
-            <a:off x="4681728" y="4480560"/>
-            <a:ext cx="2880360" cy="1005840"/>
+            <a:off x="1005840" y="4434840"/>
+            <a:ext cx="2926080" cy="1051560"/>
           </a:xfrm>
           <a:prstGeom prst="rect">
             <a:avLst/>
@@ -3772,17 +3774,36 @@
                 <a:spcPct val="115000"/>
               </a:lnSpc>
               <a:spcAft>
+                <a:spcPts val="300"/>
+              </a:spcAft>
+            </a:pPr>
+            <a:r>
+              <a:rPr sz="1550" b="1" i="0">
+                <a:solidFill>
+                  <a:srgbClr val="10245C"/>
+                </a:solidFill>
+                <a:latin typeface="Segoe UI"/>
+              </a:rPr>
+              <a:t>Vedant Nimkar</a:t>
+            </a:r>
+          </a:p>
+          <a:p>
+            <a:pPr algn="l">
+              <a:lnSpc>
+                <a:spcPct val="115000"/>
+              </a:lnSpc>
+              <a:spcAft>
                 <a:spcPts val="400"/>
               </a:spcAft>
             </a:pPr>
             <a:r>
-              <a:rPr sz="1650" b="1" i="0">
-                <a:solidFill>
-                  <a:srgbClr val="10245C"/>
-                </a:solidFill>
-                <a:latin typeface="Segoe UI"/>
-              </a:rPr>
-              <a:t>Jitesh Bobde</a:t>
+              <a:rPr sz="1200" b="0" i="0">
+                <a:solidFill>
+                  <a:srgbClr val="555555"/>
+                </a:solidFill>
+                <a:latin typeface="Segoe UI"/>
+              </a:rPr>
+              <a:t>Reg. No. 26MML0045</a:t>
             </a:r>
           </a:p>
           <a:p>
@@ -3795,32 +3816,13 @@
               </a:spcAft>
             </a:pPr>
             <a:r>
-              <a:rPr sz="1200" b="0" i="0">
-                <a:solidFill>
-                  <a:srgbClr val="555555"/>
-                </a:solidFill>
-                <a:latin typeface="Segoe UI"/>
-              </a:rPr>
-              <a:t>Reg. No. 26MML0025</a:t>
-            </a:r>
-          </a:p>
-          <a:p>
-            <a:pPr algn="l">
-              <a:lnSpc>
-                <a:spcPct val="115000"/>
-              </a:lnSpc>
-              <a:spcAft>
-                <a:spcPts val="600"/>
-              </a:spcAft>
-            </a:pPr>
-            <a:r>
               <a:rPr sz="950" b="1" i="0">
                 <a:solidFill>
-                  <a:srgbClr val="3366CC"/>
-                </a:solidFill>
-                <a:latin typeface="Segoe UI"/>
-              </a:rPr>
-              <a:t>MEMBER</a:t>
+                  <a:srgbClr val="1E7A4F"/>
+                </a:solidFill>
+                <a:latin typeface="Segoe UI"/>
+              </a:rPr>
+              <a:t>TEAM LEADER</a:t>
             </a:r>
           </a:p>
         </p:txBody>
@@ -3833,8 +3835,8 @@
         </p:nvSpPr>
         <p:spPr>
           <a:xfrm>
-            <a:off x="8037576" y="4251960"/>
-            <a:ext cx="3401568" cy="1371600"/>
+            <a:off x="4389120" y="4297680"/>
+            <a:ext cx="3401568" cy="1325880"/>
           </a:xfrm>
           <a:prstGeom prst="rect">
             <a:avLst/>
@@ -3879,7 +3881,7 @@
         </p:nvSpPr>
         <p:spPr>
           <a:xfrm>
-            <a:off x="8037576" y="4251960"/>
+            <a:off x="4389120" y="4297680"/>
             <a:ext cx="3401568" cy="64008"/>
           </a:xfrm>
           <a:prstGeom prst="rect">
@@ -3923,8 +3925,8 @@
         </p:nvSpPr>
         <p:spPr>
           <a:xfrm>
-            <a:off x="8311896" y="4480560"/>
-            <a:ext cx="2880360" cy="1005840"/>
+            <a:off x="4617720" y="4434840"/>
+            <a:ext cx="2926080" cy="1051560"/>
           </a:xfrm>
           <a:prstGeom prst="rect">
             <a:avLst/>
@@ -3942,17 +3944,36 @@
                 <a:spcPct val="115000"/>
               </a:lnSpc>
               <a:spcAft>
+                <a:spcPts val="300"/>
+              </a:spcAft>
+            </a:pPr>
+            <a:r>
+              <a:rPr sz="1550" b="1" i="0">
+                <a:solidFill>
+                  <a:srgbClr val="10245C"/>
+                </a:solidFill>
+                <a:latin typeface="Segoe UI"/>
+              </a:rPr>
+              <a:t>Jitesh Bobde</a:t>
+            </a:r>
+          </a:p>
+          <a:p>
+            <a:pPr algn="l">
+              <a:lnSpc>
+                <a:spcPct val="115000"/>
+              </a:lnSpc>
+              <a:spcAft>
                 <a:spcPts val="400"/>
               </a:spcAft>
             </a:pPr>
             <a:r>
-              <a:rPr sz="1650" b="1" i="0">
-                <a:solidFill>
-                  <a:srgbClr val="10245C"/>
-                </a:solidFill>
-                <a:latin typeface="Segoe UI"/>
-              </a:rPr>
-              <a:t>Ayush Sharma</a:t>
+              <a:rPr sz="1200" b="0" i="0">
+                <a:solidFill>
+                  <a:srgbClr val="555555"/>
+                </a:solidFill>
+                <a:latin typeface="Segoe UI"/>
+              </a:rPr>
+              <a:t>Reg. No. 26MML0025</a:t>
             </a:r>
           </a:p>
           <a:p>
@@ -3965,25 +3986,6 @@
               </a:spcAft>
             </a:pPr>
             <a:r>
-              <a:rPr sz="1200" b="0" i="0">
-                <a:solidFill>
-                  <a:srgbClr val="555555"/>
-                </a:solidFill>
-                <a:latin typeface="Segoe UI"/>
-              </a:rPr>
-              <a:t>Reg. No. 26MML0043</a:t>
-            </a:r>
-          </a:p>
-          <a:p>
-            <a:pPr algn="l">
-              <a:lnSpc>
-                <a:spcPct val="115000"/>
-              </a:lnSpc>
-              <a:spcAft>
-                <a:spcPts val="600"/>
-              </a:spcAft>
-            </a:pPr>
-            <a:r>
               <a:rPr sz="950" b="1" i="0">
                 <a:solidFill>
                   <a:srgbClr val="3366CC"/>
@@ -3997,14 +3999,104 @@
       </p:sp>
       <p:sp>
         <p:nvSpPr>
-          <p:cNvPr id="19" name="TextBox 18"/>
+          <p:cNvPr id="19" name="Rectangle 18"/>
+          <p:cNvSpPr/>
+          <p:nvPr/>
+        </p:nvSpPr>
+        <p:spPr>
+          <a:xfrm>
+            <a:off x="8001000" y="4297680"/>
+            <a:ext cx="3401568" cy="1325880"/>
+          </a:xfrm>
+          <a:prstGeom prst="rect">
+            <a:avLst/>
+          </a:prstGeom>
+          <a:solidFill>
+            <a:srgbClr val="F3F7FF"/>
+          </a:solidFill>
+          <a:ln w="12700">
+            <a:solidFill>
+              <a:srgbClr val="C8D4EE"/>
+            </a:solidFill>
+          </a:ln>
+          <a:effectLst/>
+        </p:spPr>
+        <p:style>
+          <a:lnRef idx="1">
+            <a:schemeClr val="accent1"/>
+          </a:lnRef>
+          <a:fillRef idx="3">
+            <a:schemeClr val="accent1"/>
+          </a:fillRef>
+          <a:effectRef idx="2">
+            <a:schemeClr val="accent1"/>
+          </a:effectRef>
+          <a:fontRef idx="minor">
+            <a:schemeClr val="lt1"/>
+          </a:fontRef>
+        </p:style>
+        <p:txBody>
+          <a:bodyPr rtlCol="0" anchor="ctr"/>
+          <a:lstStyle/>
+          <a:p>
+            <a:pPr algn="ctr"/>
+          </a:p>
+        </p:txBody>
+      </p:sp>
+      <p:sp>
+        <p:nvSpPr>
+          <p:cNvPr id="20" name="Rectangle 19"/>
+          <p:cNvSpPr/>
+          <p:nvPr/>
+        </p:nvSpPr>
+        <p:spPr>
+          <a:xfrm>
+            <a:off x="8001000" y="4297680"/>
+            <a:ext cx="3401568" cy="64008"/>
+          </a:xfrm>
+          <a:prstGeom prst="rect">
+            <a:avLst/>
+          </a:prstGeom>
+          <a:solidFill>
+            <a:srgbClr val="3366CC"/>
+          </a:solidFill>
+          <a:ln>
+            <a:noFill/>
+          </a:ln>
+          <a:effectLst/>
+        </p:spPr>
+        <p:style>
+          <a:lnRef idx="1">
+            <a:schemeClr val="accent1"/>
+          </a:lnRef>
+          <a:fillRef idx="3">
+            <a:schemeClr val="accent1"/>
+          </a:fillRef>
+          <a:effectRef idx="2">
+            <a:schemeClr val="accent1"/>
+          </a:effectRef>
+          <a:fontRef idx="minor">
+            <a:schemeClr val="lt1"/>
+          </a:fontRef>
+        </p:style>
+        <p:txBody>
+          <a:bodyPr rtlCol="0" anchor="ctr"/>
+          <a:lstStyle/>
+          <a:p>
+            <a:pPr algn="ctr"/>
+          </a:p>
+        </p:txBody>
+      </p:sp>
+      <p:sp>
+        <p:nvSpPr>
+          <p:cNvPr id="21" name="TextBox 20"/>
           <p:cNvSpPr txBox="1"/>
           <p:nvPr/>
         </p:nvSpPr>
         <p:spPr>
           <a:xfrm>
-            <a:off x="777240" y="5870448"/>
-            <a:ext cx="10607040" cy="320040"/>
+            <a:off x="8229600" y="4434840"/>
+            <a:ext cx="2926080" cy="1051560"/>
           </a:xfrm>
           <a:prstGeom prst="rect">
             <a:avLst/>
@@ -4022,31 +4114,69 @@
                 <a:spcPct val="115000"/>
               </a:lnSpc>
               <a:spcAft>
+                <a:spcPts val="300"/>
+              </a:spcAft>
+            </a:pPr>
+            <a:r>
+              <a:rPr sz="1550" b="1" i="0">
+                <a:solidFill>
+                  <a:srgbClr val="10245C"/>
+                </a:solidFill>
+                <a:latin typeface="Segoe UI"/>
+              </a:rPr>
+              <a:t>Ayush Sharma</a:t>
+            </a:r>
+          </a:p>
+          <a:p>
+            <a:pPr algn="l">
+              <a:lnSpc>
+                <a:spcPct val="115000"/>
+              </a:lnSpc>
+              <a:spcAft>
+                <a:spcPts val="400"/>
+              </a:spcAft>
+            </a:pPr>
+            <a:r>
+              <a:rPr sz="1200" b="0" i="0">
+                <a:solidFill>
+                  <a:srgbClr val="555555"/>
+                </a:solidFill>
+                <a:latin typeface="Segoe UI"/>
+              </a:rPr>
+              <a:t>Reg. No. 26MML0043</a:t>
+            </a:r>
+          </a:p>
+          <a:p>
+            <a:pPr algn="l">
+              <a:lnSpc>
+                <a:spcPct val="115000"/>
+              </a:lnSpc>
+              <a:spcAft>
                 <a:spcPts val="600"/>
               </a:spcAft>
             </a:pPr>
             <a:r>
-              <a:rPr sz="1200" b="0" i="1">
-                <a:solidFill>
-                  <a:srgbClr val="555555"/>
-                </a:solidFill>
-                <a:latin typeface="Segoe UI"/>
-              </a:rPr>
-              <a:t>Full Implementation: Star Schema (52.5k rows) • ML Demand Forecast • Shewhart 3σ Anomalies • Apache ECharts &amp; Power BI</a:t>
-            </a:r>
-          </a:p>
-        </p:txBody>
-      </p:sp>
-      <p:sp>
-        <p:nvSpPr>
-          <p:cNvPr id="20" name="TextBox 19"/>
+              <a:rPr sz="950" b="1" i="0">
+                <a:solidFill>
+                  <a:srgbClr val="3366CC"/>
+                </a:solidFill>
+                <a:latin typeface="Segoe UI"/>
+              </a:rPr>
+              <a:t>MEMBER</a:t>
+            </a:r>
+          </a:p>
+        </p:txBody>
+      </p:sp>
+      <p:sp>
+        <p:nvSpPr>
+          <p:cNvPr id="22" name="TextBox 21"/>
           <p:cNvSpPr txBox="1"/>
           <p:nvPr/>
         </p:nvSpPr>
         <p:spPr>
           <a:xfrm>
-            <a:off x="777240" y="6629400"/>
-            <a:ext cx="10607040" cy="219456"/>
+            <a:off x="777240" y="5779008"/>
+            <a:ext cx="10607040" cy="274320"/>
           </a:xfrm>
           <a:prstGeom prst="rect">
             <a:avLst/>
@@ -4068,13 +4198,55 @@
               </a:spcAft>
             </a:pPr>
             <a:r>
-              <a:rPr sz="1000" b="0" i="0">
+              <a:rPr sz="1050" b="0" i="1">
+                <a:solidFill>
+                  <a:srgbClr val="555555"/>
+                </a:solidFill>
+                <a:latin typeface="Segoe UI"/>
+              </a:rPr>
+              <a:t>Deliverables: Star Schema Warehouse (52.5k rows) • Native Power BI (.pbip / TMDL) • ML Ridge Forecast (R²=0.996) • ECharts Web App • Vercel Cloud</a:t>
+            </a:r>
+          </a:p>
+        </p:txBody>
+      </p:sp>
+      <p:sp>
+        <p:nvSpPr>
+          <p:cNvPr id="23" name="TextBox 22"/>
+          <p:cNvSpPr txBox="1"/>
+          <p:nvPr/>
+        </p:nvSpPr>
+        <p:spPr>
+          <a:xfrm>
+            <a:off x="777240" y="6601968"/>
+            <a:ext cx="10607040" cy="201168"/>
+          </a:xfrm>
+          <a:prstGeom prst="rect">
+            <a:avLst/>
+          </a:prstGeom>
+          <a:noFill/>
+        </p:spPr>
+        <p:txBody>
+          <a:bodyPr wrap="square" lIns="0" rIns="0" tIns="0" bIns="0">
+            <a:spAutoFit/>
+          </a:bodyPr>
+          <a:lstStyle/>
+          <a:p>
+            <a:pPr algn="l">
+              <a:lnSpc>
+                <a:spcPct val="115000"/>
+              </a:lnSpc>
+              <a:spcAft>
+                <a:spcPts val="600"/>
+              </a:spcAft>
+            </a:pPr>
+            <a:r>
+              <a:rPr sz="950" b="0" i="0">
                 <a:solidFill>
                   <a:srgbClr val="6FA3FF"/>
                 </a:solidFill>
                 <a:latin typeface="Segoe UI"/>
               </a:rPr>
-              <a:t>M.Tech - Computer Science and Engineering</a:t>
+              <a:t>M.Tech in Computer Science and Engineering / Artificial Intelligence and Machine Learning  |  VIT Vellore - 632014</a:t>
             </a:r>
           </a:p>
         </p:txBody>
@@ -9232,7 +9404,7 @@
                 </a:solidFill>
                 <a:latin typeface="Segoe UI"/>
               </a:rPr>
-              <a:t>Decision Support &amp; Financial Impact</a:t>
+              <a:t>Enterprise Power BI Architecture (.pbip, TMDL &amp; PBIR)</a:t>
             </a:r>
           </a:p>
         </p:txBody>
@@ -9289,8 +9461,8 @@
         </p:nvSpPr>
         <p:spPr>
           <a:xfrm>
-            <a:off x="502920" y="1371600"/>
-            <a:ext cx="5477256" cy="2240280"/>
+            <a:off x="502920" y="1261872"/>
+            <a:ext cx="5477256" cy="4892040"/>
           </a:xfrm>
           <a:prstGeom prst="rect">
             <a:avLst/>
@@ -9335,7 +9507,348 @@
         </p:nvSpPr>
         <p:spPr>
           <a:xfrm>
-            <a:off x="502920" y="1371600"/>
+            <a:off x="502920" y="1261872"/>
+            <a:ext cx="5477256" cy="64008"/>
+          </a:xfrm>
+          <a:prstGeom prst="rect">
+            <a:avLst/>
+          </a:prstGeom>
+          <a:solidFill>
+            <a:srgbClr val="10245C"/>
+          </a:solidFill>
+          <a:ln>
+            <a:noFill/>
+          </a:ln>
+          <a:effectLst/>
+        </p:spPr>
+        <p:style>
+          <a:lnRef idx="1">
+            <a:schemeClr val="accent1"/>
+          </a:lnRef>
+          <a:fillRef idx="3">
+            <a:schemeClr val="accent1"/>
+          </a:fillRef>
+          <a:effectRef idx="2">
+            <a:schemeClr val="accent1"/>
+          </a:effectRef>
+          <a:fontRef idx="minor">
+            <a:schemeClr val="lt1"/>
+          </a:fontRef>
+        </p:style>
+        <p:txBody>
+          <a:bodyPr rtlCol="0" anchor="ctr"/>
+          <a:lstStyle/>
+          <a:p>
+            <a:pPr algn="ctr"/>
+          </a:p>
+        </p:txBody>
+      </p:sp>
+      <p:sp>
+        <p:nvSpPr>
+          <p:cNvPr id="9" name="TextBox 8"/>
+          <p:cNvSpPr txBox="1"/>
+          <p:nvPr/>
+        </p:nvSpPr>
+        <p:spPr>
+          <a:xfrm>
+            <a:off x="777240" y="1508760"/>
+            <a:ext cx="4937760" cy="274320"/>
+          </a:xfrm>
+          <a:prstGeom prst="rect">
+            <a:avLst/>
+          </a:prstGeom>
+          <a:noFill/>
+        </p:spPr>
+        <p:txBody>
+          <a:bodyPr wrap="square" lIns="0" rIns="0" tIns="0" bIns="0">
+            <a:spAutoFit/>
+          </a:bodyPr>
+          <a:lstStyle/>
+          <a:p>
+            <a:pPr algn="l">
+              <a:lnSpc>
+                <a:spcPct val="115000"/>
+              </a:lnSpc>
+              <a:spcAft>
+                <a:spcPts val="600"/>
+              </a:spcAft>
+            </a:pPr>
+            <a:r>
+              <a:rPr sz="1150" b="1" i="0">
+                <a:solidFill>
+                  <a:srgbClr val="10245C"/>
+                </a:solidFill>
+                <a:latin typeface="Segoe UI"/>
+              </a:rPr>
+              <a:t>TMDL GIT-INTEGRATED SEMANTIC MODEL</a:t>
+            </a:r>
+          </a:p>
+        </p:txBody>
+      </p:sp>
+      <p:sp>
+        <p:nvSpPr>
+          <p:cNvPr id="10" name="TextBox 9"/>
+          <p:cNvSpPr txBox="1"/>
+          <p:nvPr/>
+        </p:nvSpPr>
+        <p:spPr>
+          <a:xfrm>
+            <a:off x="777240" y="1874519"/>
+            <a:ext cx="4937760" cy="4114800"/>
+          </a:xfrm>
+          <a:prstGeom prst="rect">
+            <a:avLst/>
+          </a:prstGeom>
+          <a:noFill/>
+        </p:spPr>
+        <p:txBody>
+          <a:bodyPr wrap="square" lIns="0" rIns="0" tIns="0" bIns="0">
+            <a:spAutoFit/>
+          </a:bodyPr>
+          <a:lstStyle/>
+          <a:p/>
+          <a:p>
+            <a:pPr>
+              <a:lnSpc>
+                <a:spcPct val="118000"/>
+              </a:lnSpc>
+              <a:spcAft>
+                <a:spcPts val="1000"/>
+              </a:spcAft>
+            </a:pPr>
+            <a:r>
+              <a:rPr sz="1100">
+                <a:solidFill>
+                  <a:srgbClr val="3366CC"/>
+                </a:solidFill>
+                <a:latin typeface="Segoe UI"/>
+              </a:rPr>
+              <a:t>▪   </a:t>
+            </a:r>
+            <a:r>
+              <a:rPr sz="1100" b="1">
+                <a:solidFill>
+                  <a:srgbClr val="10245C"/>
+                </a:solidFill>
+                <a:latin typeface="Segoe UI"/>
+              </a:rPr>
+              <a:t>Migration to .PBIP Format - </a:t>
+            </a:r>
+            <a:r>
+              <a:rPr sz="1100">
+                <a:solidFill>
+                  <a:srgbClr val="1C1C1C"/>
+                </a:solidFill>
+                <a:latin typeface="Segoe UI"/>
+              </a:rPr>
+              <a:t>Transitioned from fragile binary .pbix packages to Microsoft Fabric's official Power BI Project format (.pbip) for seamless version control.</a:t>
+            </a:r>
+          </a:p>
+          <a:p>
+            <a:pPr>
+              <a:lnSpc>
+                <a:spcPct val="118000"/>
+              </a:lnSpc>
+              <a:spcAft>
+                <a:spcPts val="1000"/>
+              </a:spcAft>
+            </a:pPr>
+            <a:r>
+              <a:rPr sz="1100">
+                <a:solidFill>
+                  <a:srgbClr val="3366CC"/>
+                </a:solidFill>
+                <a:latin typeface="Segoe UI"/>
+              </a:rPr>
+              <a:t>▪   </a:t>
+            </a:r>
+            <a:r>
+              <a:rPr sz="1100" b="1">
+                <a:solidFill>
+                  <a:srgbClr val="10245C"/>
+                </a:solidFill>
+                <a:latin typeface="Segoe UI"/>
+              </a:rPr>
+              <a:t>TMDL Schema Definition - </a:t>
+            </a:r>
+            <a:r>
+              <a:rPr sz="1100">
+                <a:solidFill>
+                  <a:srgbClr val="1C1C1C"/>
+                </a:solidFill>
+                <a:latin typeface="Segoe UI"/>
+              </a:rPr>
+              <a:t>Human-readable Tabular Model Definition Language files in SemanticModel/definition/ storing 11 tables and full model metadata.</a:t>
+            </a:r>
+          </a:p>
+          <a:p>
+            <a:pPr>
+              <a:lnSpc>
+                <a:spcPct val="118000"/>
+              </a:lnSpc>
+              <a:spcAft>
+                <a:spcPts val="1000"/>
+              </a:spcAft>
+            </a:pPr>
+            <a:r>
+              <a:rPr sz="1100">
+                <a:solidFill>
+                  <a:srgbClr val="3366CC"/>
+                </a:solidFill>
+                <a:latin typeface="Segoe UI"/>
+              </a:rPr>
+              <a:t>▪   </a:t>
+            </a:r>
+            <a:r>
+              <a:rPr sz="1100" b="1">
+                <a:solidFill>
+                  <a:srgbClr val="10245C"/>
+                </a:solidFill>
+                <a:latin typeface="Segoe UI"/>
+              </a:rPr>
+              <a:t>12 Enterprise DAX Measures - </a:t>
+            </a:r>
+            <a:r>
+              <a:rPr sz="1100">
+                <a:solidFill>
+                  <a:srgbClr val="1C1C1C"/>
+                </a:solidFill>
+                <a:latin typeface="Segoe UI"/>
+              </a:rPr>
+              <a:t>Measures for Total GWh, Electricity Spend (Cr), Peak kW, Solar Penetration %, Power Factor, and Carbon Offsets with full lineage tags.</a:t>
+            </a:r>
+          </a:p>
+          <a:p>
+            <a:pPr>
+              <a:lnSpc>
+                <a:spcPct val="118000"/>
+              </a:lnSpc>
+              <a:spcAft>
+                <a:spcPts val="1000"/>
+              </a:spcAft>
+            </a:pPr>
+            <a:r>
+              <a:rPr sz="1100">
+                <a:solidFill>
+                  <a:srgbClr val="3366CC"/>
+                </a:solidFill>
+                <a:latin typeface="Segoe UI"/>
+              </a:rPr>
+              <a:t>▪   </a:t>
+            </a:r>
+            <a:r>
+              <a:rPr sz="1100" b="1">
+                <a:solidFill>
+                  <a:srgbClr val="10245C"/>
+                </a:solidFill>
+                <a:latin typeface="Segoe UI"/>
+              </a:rPr>
+              <a:t>Power Query M Ingestion - </a:t>
+            </a:r>
+            <a:r>
+              <a:rPr sz="1100">
+                <a:solidFill>
+                  <a:srgbClr val="1C1C1C"/>
+                </a:solidFill>
+                <a:latin typeface="Segoe UI"/>
+              </a:rPr>
+              <a:t>Automated CSV partition expressions mapping timestamp, electrical parameters, tariffs, and CDH weather inputs with strict typing.</a:t>
+            </a:r>
+          </a:p>
+          <a:p>
+            <a:pPr>
+              <a:lnSpc>
+                <a:spcPct val="118000"/>
+              </a:lnSpc>
+              <a:spcAft>
+                <a:spcPts val="1000"/>
+              </a:spcAft>
+            </a:pPr>
+            <a:r>
+              <a:rPr sz="1100">
+                <a:solidFill>
+                  <a:srgbClr val="3366CC"/>
+                </a:solidFill>
+                <a:latin typeface="Segoe UI"/>
+              </a:rPr>
+              <a:t>▪   </a:t>
+            </a:r>
+            <a:r>
+              <a:rPr sz="1100" b="1">
+                <a:solidFill>
+                  <a:srgbClr val="10245C"/>
+                </a:solidFill>
+                <a:latin typeface="Segoe UI"/>
+              </a:rPr>
+              <a:t>Zero-BOM Serialization - </a:t>
+            </a:r>
+            <a:r>
+              <a:rPr sz="1100">
+                <a:solidFill>
+                  <a:srgbClr val="1C1C1C"/>
+                </a:solidFill>
+                <a:latin typeface="Segoe UI"/>
+              </a:rPr>
+              <a:t>Engineered clean UTF-16LE encoding (without BOM) resolving PowerBIFileSerializer DiagramLayout parser exceptions natively.</a:t>
+            </a:r>
+          </a:p>
+        </p:txBody>
+      </p:sp>
+      <p:sp>
+        <p:nvSpPr>
+          <p:cNvPr id="11" name="Rectangle 10"/>
+          <p:cNvSpPr/>
+          <p:nvPr/>
+        </p:nvSpPr>
+        <p:spPr>
+          <a:xfrm>
+            <a:off x="6199632" y="1261872"/>
+            <a:ext cx="5477256" cy="4892040"/>
+          </a:xfrm>
+          <a:prstGeom prst="rect">
+            <a:avLst/>
+          </a:prstGeom>
+          <a:solidFill>
+            <a:srgbClr val="FFFFFF"/>
+          </a:solidFill>
+          <a:ln w="12700">
+            <a:solidFill>
+              <a:srgbClr val="C8D4EE"/>
+            </a:solidFill>
+          </a:ln>
+          <a:effectLst/>
+        </p:spPr>
+        <p:style>
+          <a:lnRef idx="1">
+            <a:schemeClr val="accent1"/>
+          </a:lnRef>
+          <a:fillRef idx="3">
+            <a:schemeClr val="accent1"/>
+          </a:fillRef>
+          <a:effectRef idx="2">
+            <a:schemeClr val="accent1"/>
+          </a:effectRef>
+          <a:fontRef idx="minor">
+            <a:schemeClr val="lt1"/>
+          </a:fontRef>
+        </p:style>
+        <p:txBody>
+          <a:bodyPr rtlCol="0" anchor="ctr"/>
+          <a:lstStyle/>
+          <a:p>
+            <a:pPr algn="ctr"/>
+          </a:p>
+        </p:txBody>
+      </p:sp>
+      <p:sp>
+        <p:nvSpPr>
+          <p:cNvPr id="12" name="Rectangle 11"/>
+          <p:cNvSpPr/>
+          <p:nvPr/>
+        </p:nvSpPr>
+        <p:spPr>
+          <a:xfrm>
+            <a:off x="6199632" y="1261872"/>
             <a:ext cx="5477256" cy="64008"/>
           </a:xfrm>
           <a:prstGeom prst="rect">
@@ -9373,14 +9886,14 @@
       </p:sp>
       <p:sp>
         <p:nvSpPr>
-          <p:cNvPr id="9" name="TextBox 8"/>
+          <p:cNvPr id="13" name="TextBox 12"/>
           <p:cNvSpPr txBox="1"/>
           <p:nvPr/>
         </p:nvSpPr>
         <p:spPr>
           <a:xfrm>
-            <a:off x="777240" y="1572768"/>
-            <a:ext cx="4937760" cy="320040"/>
+            <a:off x="6492240" y="1508760"/>
+            <a:ext cx="4937760" cy="274320"/>
           </a:xfrm>
           <a:prstGeom prst="rect">
             <a:avLst/>
@@ -9402,27 +9915,27 @@
               </a:spcAft>
             </a:pPr>
             <a:r>
-              <a:rPr sz="1500" b="1" i="0">
-                <a:solidFill>
-                  <a:srgbClr val="10245C"/>
-                </a:solidFill>
-                <a:latin typeface="Segoe UI"/>
-              </a:rPr>
-              <a:t>Peak Shaving Optimization</a:t>
-            </a:r>
-          </a:p>
-        </p:txBody>
-      </p:sp>
-      <p:sp>
-        <p:nvSpPr>
-          <p:cNvPr id="10" name="TextBox 9"/>
+              <a:rPr sz="1150" b="1" i="0">
+                <a:solidFill>
+                  <a:srgbClr val="3366CC"/>
+                </a:solidFill>
+                <a:latin typeface="Segoe UI"/>
+              </a:rPr>
+              <a:t>PBIR MULTI-PAGE VISUAL REPORT ENGINE</a:t>
+            </a:r>
+          </a:p>
+        </p:txBody>
+      </p:sp>
+      <p:sp>
+        <p:nvSpPr>
+          <p:cNvPr id="14" name="TextBox 13"/>
           <p:cNvSpPr txBox="1"/>
           <p:nvPr/>
         </p:nvSpPr>
         <p:spPr>
           <a:xfrm>
-            <a:off x="777240" y="2011680"/>
-            <a:ext cx="4937760" cy="1463040"/>
+            <a:off x="6492240" y="1874519"/>
+            <a:ext cx="4937760" cy="4114800"/>
           </a:xfrm>
           <a:prstGeom prst="rect">
             <a:avLst/>
@@ -9434,127 +9947,204 @@
             <a:spAutoFit/>
           </a:bodyPr>
           <a:lstStyle/>
-          <a:p>
-            <a:pPr algn="l">
-              <a:lnSpc>
-                <a:spcPct val="120000"/>
-              </a:lnSpc>
-              <a:spcAft>
-                <a:spcPts val="600"/>
-              </a:spcAft>
-            </a:pPr>
-            <a:r>
-              <a:rPr sz="1250" b="0" i="0">
+          <a:p/>
+          <a:p>
+            <a:pPr>
+              <a:lnSpc>
+                <a:spcPct val="118000"/>
+              </a:lnSpc>
+              <a:spcAft>
+                <a:spcPts val="1000"/>
+              </a:spcAft>
+            </a:pPr>
+            <a:r>
+              <a:rPr sz="1100">
+                <a:solidFill>
+                  <a:srgbClr val="3366CC"/>
+                </a:solidFill>
+                <a:latin typeface="Segoe UI"/>
+              </a:rPr>
+              <a:t>▪   </a:t>
+            </a:r>
+            <a:r>
+              <a:rPr sz="1100" b="1">
+                <a:solidFill>
+                  <a:srgbClr val="10245C"/>
+                </a:solidFill>
+                <a:latin typeface="Segoe UI"/>
+              </a:rPr>
+              <a:t>Page 1: Executive Overview - </a:t>
+            </a:r>
+            <a:r>
+              <a:rPr sz="1100">
                 <a:solidFill>
                   <a:srgbClr val="1C1C1C"/>
                 </a:solidFill>
                 <a:latin typeface="Segoe UI"/>
               </a:rPr>
-              <a:t>Shifting HVAC load via 11:00-13:00 pre-cooling reduces contract demand by 15%, saving an estimated INR 18.5 Lakhs annually in tariff demand charges.</a:t>
-            </a:r>
-          </a:p>
-        </p:txBody>
-      </p:sp>
-      <p:sp>
-        <p:nvSpPr>
-          <p:cNvPr id="11" name="Rectangle 10"/>
-          <p:cNvSpPr/>
-          <p:nvPr/>
-        </p:nvSpPr>
-        <p:spPr>
-          <a:xfrm>
-            <a:off x="502920" y="3794760"/>
-            <a:ext cx="5477256" cy="2240280"/>
-          </a:xfrm>
-          <a:prstGeom prst="rect">
-            <a:avLst/>
-          </a:prstGeom>
-          <a:solidFill>
-            <a:srgbClr val="F3F7FF"/>
-          </a:solidFill>
-          <a:ln w="12700">
-            <a:solidFill>
-              <a:srgbClr val="C8D4EE"/>
-            </a:solidFill>
-          </a:ln>
-          <a:effectLst/>
-        </p:spPr>
-        <p:style>
-          <a:lnRef idx="1">
-            <a:schemeClr val="accent1"/>
-          </a:lnRef>
-          <a:fillRef idx="3">
-            <a:schemeClr val="accent1"/>
-          </a:fillRef>
-          <a:effectRef idx="2">
-            <a:schemeClr val="accent1"/>
-          </a:effectRef>
-          <a:fontRef idx="minor">
-            <a:schemeClr val="lt1"/>
-          </a:fontRef>
-        </p:style>
-        <p:txBody>
-          <a:bodyPr rtlCol="0" anchor="ctr"/>
-          <a:lstStyle/>
-          <a:p>
-            <a:pPr algn="ctr"/>
-          </a:p>
-        </p:txBody>
-      </p:sp>
-      <p:sp>
-        <p:nvSpPr>
-          <p:cNvPr id="12" name="Rectangle 11"/>
-          <p:cNvSpPr/>
-          <p:nvPr/>
-        </p:nvSpPr>
-        <p:spPr>
-          <a:xfrm>
-            <a:off x="502920" y="3794760"/>
-            <a:ext cx="5477256" cy="64008"/>
-          </a:xfrm>
-          <a:prstGeom prst="rect">
-            <a:avLst/>
-          </a:prstGeom>
-          <a:solidFill>
-            <a:srgbClr val="10245C"/>
-          </a:solidFill>
-          <a:ln>
-            <a:noFill/>
-          </a:ln>
-          <a:effectLst/>
-        </p:spPr>
-        <p:style>
-          <a:lnRef idx="1">
-            <a:schemeClr val="accent1"/>
-          </a:lnRef>
-          <a:fillRef idx="3">
-            <a:schemeClr val="accent1"/>
-          </a:fillRef>
-          <a:effectRef idx="2">
-            <a:schemeClr val="accent1"/>
-          </a:effectRef>
-          <a:fontRef idx="minor">
-            <a:schemeClr val="lt1"/>
-          </a:fontRef>
-        </p:style>
-        <p:txBody>
-          <a:bodyPr rtlCol="0" anchor="ctr"/>
-          <a:lstStyle/>
-          <a:p>
-            <a:pPr algn="ctr"/>
-          </a:p>
-        </p:txBody>
-      </p:sp>
-      <p:sp>
-        <p:nvSpPr>
-          <p:cNvPr id="13" name="TextBox 12"/>
+              <a:t>6 KPI summary cards, 24-hr diurnal power flow line chart, facility consumption bar chart, and substation slicers.</a:t>
+            </a:r>
+          </a:p>
+          <a:p>
+            <a:pPr>
+              <a:lnSpc>
+                <a:spcPct val="118000"/>
+              </a:lnSpc>
+              <a:spcAft>
+                <a:spcPts val="1000"/>
+              </a:spcAft>
+            </a:pPr>
+            <a:r>
+              <a:rPr sz="1100">
+                <a:solidFill>
+                  <a:srgbClr val="3366CC"/>
+                </a:solidFill>
+                <a:latin typeface="Segoe UI"/>
+              </a:rPr>
+              <a:t>▪   </a:t>
+            </a:r>
+            <a:r>
+              <a:rPr sz="1100" b="1">
+                <a:solidFill>
+                  <a:srgbClr val="10245C"/>
+                </a:solidFill>
+                <a:latin typeface="Segoe UI"/>
+              </a:rPr>
+              <a:t>Page 2: Load Profiling &amp; Matrix - </a:t>
+            </a:r>
+            <a:r>
+              <a:rPr sz="1100">
+                <a:solidFill>
+                  <a:srgbClr val="1C1C1C"/>
+                </a:solidFill>
+                <a:latin typeface="Segoe UI"/>
+              </a:rPr>
+              <a:t>Interactive 24x7 hour-by-day heatmap matrix, end-use submetering donut chart, and high-energy appliance ranking tables.</a:t>
+            </a:r>
+          </a:p>
+          <a:p>
+            <a:pPr>
+              <a:lnSpc>
+                <a:spcPct val="118000"/>
+              </a:lnSpc>
+              <a:spcAft>
+                <a:spcPts val="1000"/>
+              </a:spcAft>
+            </a:pPr>
+            <a:r>
+              <a:rPr sz="1100">
+                <a:solidFill>
+                  <a:srgbClr val="3366CC"/>
+                </a:solidFill>
+                <a:latin typeface="Segoe UI"/>
+              </a:rPr>
+              <a:t>▪   </a:t>
+            </a:r>
+            <a:r>
+              <a:rPr sz="1100" b="1">
+                <a:solidFill>
+                  <a:srgbClr val="10245C"/>
+                </a:solidFill>
+                <a:latin typeface="Segoe UI"/>
+              </a:rPr>
+              <a:t>Page 3: ML Forecast &amp; Anomaly Audit - </a:t>
+            </a:r>
+            <a:r>
+              <a:rPr sz="1100">
+                <a:solidFill>
+                  <a:srgbClr val="1C1C1C"/>
+                </a:solidFill>
+                <a:latin typeface="Segoe UI"/>
+              </a:rPr>
+              <a:t>168-hour Ridge/Prophet demand forecast with 95% confidence bands, Shewhart ±3σ control limits, and breach audit log.</a:t>
+            </a:r>
+          </a:p>
+          <a:p>
+            <a:pPr>
+              <a:lnSpc>
+                <a:spcPct val="118000"/>
+              </a:lnSpc>
+              <a:spcAft>
+                <a:spcPts val="1000"/>
+              </a:spcAft>
+            </a:pPr>
+            <a:r>
+              <a:rPr sz="1100">
+                <a:solidFill>
+                  <a:srgbClr val="3366CC"/>
+                </a:solidFill>
+                <a:latin typeface="Segoe UI"/>
+              </a:rPr>
+              <a:t>▪   </a:t>
+            </a:r>
+            <a:r>
+              <a:rPr sz="1100" b="1">
+                <a:solidFill>
+                  <a:srgbClr val="10245C"/>
+                </a:solidFill>
+                <a:latin typeface="Segoe UI"/>
+              </a:rPr>
+              <a:t>23 Dedicated Visual Containers - </a:t>
+            </a:r>
+            <a:r>
+              <a:rPr sz="1100">
+                <a:solidFill>
+                  <a:srgbClr val="1C1C1C"/>
+                </a:solidFill>
+                <a:latin typeface="Segoe UI"/>
+              </a:rPr>
+              <a:t>Structured PBIR JSON visual definitions with custom positioning, tab orders, query states, and cross-filtering rules.</a:t>
+            </a:r>
+          </a:p>
+          <a:p>
+            <a:pPr>
+              <a:lnSpc>
+                <a:spcPct val="118000"/>
+              </a:lnSpc>
+              <a:spcAft>
+                <a:spcPts val="1000"/>
+              </a:spcAft>
+            </a:pPr>
+            <a:r>
+              <a:rPr sz="1100">
+                <a:solidFill>
+                  <a:srgbClr val="3366CC"/>
+                </a:solidFill>
+                <a:latin typeface="Segoe UI"/>
+              </a:rPr>
+              <a:t>▪   </a:t>
+            </a:r>
+            <a:r>
+              <a:rPr sz="1100" b="1">
+                <a:solidFill>
+                  <a:srgbClr val="10245C"/>
+                </a:solidFill>
+                <a:latin typeface="Segoe UI"/>
+              </a:rPr>
+              <a:t>1-Click Native Desktop Launch - </a:t>
+            </a:r>
+            <a:r>
+              <a:rPr sz="1100">
+                <a:solidFill>
+                  <a:srgbClr val="1C1C1C"/>
+                </a:solidFill>
+                <a:latin typeface="Segoe UI"/>
+              </a:rPr>
+              <a:t>Opens seamlessly in Microsoft Power BI Desktop (v2.157+ / Aug 2026) with automatic VertiPaq model compilation in memory.</a:t>
+            </a:r>
+          </a:p>
+        </p:txBody>
+      </p:sp>
+      <p:sp>
+        <p:nvSpPr>
+          <p:cNvPr id="15" name="TextBox 14"/>
           <p:cNvSpPr txBox="1"/>
           <p:nvPr/>
         </p:nvSpPr>
         <p:spPr>
           <a:xfrm>
-            <a:off x="777240" y="3995928"/>
-            <a:ext cx="4937760" cy="320040"/>
+            <a:off x="502920" y="6437376"/>
+            <a:ext cx="8686800" cy="256032"/>
           </a:xfrm>
           <a:prstGeom prst="rect">
             <a:avLst/>
@@ -9576,438 +10166,6 @@
               </a:spcAft>
             </a:pPr>
             <a:r>
-              <a:rPr sz="1500" b="1" i="0">
-                <a:solidFill>
-                  <a:srgbClr val="10245C"/>
-                </a:solidFill>
-                <a:latin typeface="Segoe UI"/>
-              </a:rPr>
-              <a:t>Weekend Equipment Shutdown</a:t>
-            </a:r>
-          </a:p>
-        </p:txBody>
-      </p:sp>
-      <p:sp>
-        <p:nvSpPr>
-          <p:cNvPr id="14" name="TextBox 13"/>
-          <p:cNvSpPr txBox="1"/>
-          <p:nvPr/>
-        </p:nvSpPr>
-        <p:spPr>
-          <a:xfrm>
-            <a:off x="777240" y="4434840"/>
-            <a:ext cx="4937760" cy="1463040"/>
-          </a:xfrm>
-          <a:prstGeom prst="rect">
-            <a:avLst/>
-          </a:prstGeom>
-          <a:noFill/>
-        </p:spPr>
-        <p:txBody>
-          <a:bodyPr wrap="square" lIns="0" rIns="0" tIns="0" bIns="0">
-            <a:spAutoFit/>
-          </a:bodyPr>
-          <a:lstStyle/>
-          <a:p>
-            <a:pPr algn="l">
-              <a:lnSpc>
-                <a:spcPct val="120000"/>
-              </a:lnSpc>
-              <a:spcAft>
-                <a:spcPts val="600"/>
-              </a:spcAft>
-            </a:pPr>
-            <a:r>
-              <a:rPr sz="1250" b="0" i="0">
-                <a:solidFill>
-                  <a:srgbClr val="1C1C1C"/>
-                </a:solidFill>
-                <a:latin typeface="Segoe UI"/>
-              </a:rPr>
-              <a:t>Automated Shewhart 3σ alerts prevent unmonitored chiller runaways, eliminating ~INR 2.84 Lakhs in avoidable weekend waste.</a:t>
-            </a:r>
-          </a:p>
-        </p:txBody>
-      </p:sp>
-      <p:sp>
-        <p:nvSpPr>
-          <p:cNvPr id="15" name="Rectangle 14"/>
-          <p:cNvSpPr/>
-          <p:nvPr/>
-        </p:nvSpPr>
-        <p:spPr>
-          <a:xfrm>
-            <a:off x="6199632" y="1371600"/>
-            <a:ext cx="5477256" cy="2240280"/>
-          </a:xfrm>
-          <a:prstGeom prst="rect">
-            <a:avLst/>
-          </a:prstGeom>
-          <a:solidFill>
-            <a:srgbClr val="F3F7FF"/>
-          </a:solidFill>
-          <a:ln w="12700">
-            <a:solidFill>
-              <a:srgbClr val="C8D4EE"/>
-            </a:solidFill>
-          </a:ln>
-          <a:effectLst/>
-        </p:spPr>
-        <p:style>
-          <a:lnRef idx="1">
-            <a:schemeClr val="accent1"/>
-          </a:lnRef>
-          <a:fillRef idx="3">
-            <a:schemeClr val="accent1"/>
-          </a:fillRef>
-          <a:effectRef idx="2">
-            <a:schemeClr val="accent1"/>
-          </a:effectRef>
-          <a:fontRef idx="minor">
-            <a:schemeClr val="lt1"/>
-          </a:fontRef>
-        </p:style>
-        <p:txBody>
-          <a:bodyPr rtlCol="0" anchor="ctr"/>
-          <a:lstStyle/>
-          <a:p>
-            <a:pPr algn="ctr"/>
-          </a:p>
-        </p:txBody>
-      </p:sp>
-      <p:sp>
-        <p:nvSpPr>
-          <p:cNvPr id="16" name="Rectangle 15"/>
-          <p:cNvSpPr/>
-          <p:nvPr/>
-        </p:nvSpPr>
-        <p:spPr>
-          <a:xfrm>
-            <a:off x="6199632" y="1371600"/>
-            <a:ext cx="5477256" cy="64008"/>
-          </a:xfrm>
-          <a:prstGeom prst="rect">
-            <a:avLst/>
-          </a:prstGeom>
-          <a:solidFill>
-            <a:srgbClr val="1E7A4F"/>
-          </a:solidFill>
-          <a:ln>
-            <a:noFill/>
-          </a:ln>
-          <a:effectLst/>
-        </p:spPr>
-        <p:style>
-          <a:lnRef idx="1">
-            <a:schemeClr val="accent1"/>
-          </a:lnRef>
-          <a:fillRef idx="3">
-            <a:schemeClr val="accent1"/>
-          </a:fillRef>
-          <a:effectRef idx="2">
-            <a:schemeClr val="accent1"/>
-          </a:effectRef>
-          <a:fontRef idx="minor">
-            <a:schemeClr val="lt1"/>
-          </a:fontRef>
-        </p:style>
-        <p:txBody>
-          <a:bodyPr rtlCol="0" anchor="ctr"/>
-          <a:lstStyle/>
-          <a:p>
-            <a:pPr algn="ctr"/>
-          </a:p>
-        </p:txBody>
-      </p:sp>
-      <p:sp>
-        <p:nvSpPr>
-          <p:cNvPr id="17" name="TextBox 16"/>
-          <p:cNvSpPr txBox="1"/>
-          <p:nvPr/>
-        </p:nvSpPr>
-        <p:spPr>
-          <a:xfrm>
-            <a:off x="6473952" y="1572768"/>
-            <a:ext cx="4937760" cy="320040"/>
-          </a:xfrm>
-          <a:prstGeom prst="rect">
-            <a:avLst/>
-          </a:prstGeom>
-          <a:noFill/>
-        </p:spPr>
-        <p:txBody>
-          <a:bodyPr wrap="square" lIns="0" rIns="0" tIns="0" bIns="0">
-            <a:spAutoFit/>
-          </a:bodyPr>
-          <a:lstStyle/>
-          <a:p>
-            <a:pPr algn="l">
-              <a:lnSpc>
-                <a:spcPct val="115000"/>
-              </a:lnSpc>
-              <a:spcAft>
-                <a:spcPts val="600"/>
-              </a:spcAft>
-            </a:pPr>
-            <a:r>
-              <a:rPr sz="1500" b="1" i="0">
-                <a:solidFill>
-                  <a:srgbClr val="10245C"/>
-                </a:solidFill>
-                <a:latin typeface="Segoe UI"/>
-              </a:rPr>
-              <a:t>Targeted Solar Expansion</a:t>
-            </a:r>
-          </a:p>
-        </p:txBody>
-      </p:sp>
-      <p:sp>
-        <p:nvSpPr>
-          <p:cNvPr id="18" name="TextBox 17"/>
-          <p:cNvSpPr txBox="1"/>
-          <p:nvPr/>
-        </p:nvSpPr>
-        <p:spPr>
-          <a:xfrm>
-            <a:off x="6473952" y="2011680"/>
-            <a:ext cx="4937760" cy="1463040"/>
-          </a:xfrm>
-          <a:prstGeom prst="rect">
-            <a:avLst/>
-          </a:prstGeom>
-          <a:noFill/>
-        </p:spPr>
-        <p:txBody>
-          <a:bodyPr wrap="square" lIns="0" rIns="0" tIns="0" bIns="0">
-            <a:spAutoFit/>
-          </a:bodyPr>
-          <a:lstStyle/>
-          <a:p>
-            <a:pPr algn="l">
-              <a:lnSpc>
-                <a:spcPct val="120000"/>
-              </a:lnSpc>
-              <a:spcAft>
-                <a:spcPts val="600"/>
-              </a:spcAft>
-            </a:pPr>
-            <a:r>
-              <a:rPr sz="1250" b="0" i="0">
-                <a:solidFill>
-                  <a:srgbClr val="1C1C1C"/>
-                </a:solidFill>
-                <a:latin typeface="Segoe UI"/>
-              </a:rPr>
-              <a:t>Analysis pinpoints Computing Wing C (4.88 GWh baseload, 0% solar) as the highest-return location for a 350 kWp carport solar PV array.</a:t>
-            </a:r>
-          </a:p>
-        </p:txBody>
-      </p:sp>
-      <p:sp>
-        <p:nvSpPr>
-          <p:cNvPr id="19" name="Rectangle 18"/>
-          <p:cNvSpPr/>
-          <p:nvPr/>
-        </p:nvSpPr>
-        <p:spPr>
-          <a:xfrm>
-            <a:off x="6199632" y="3794760"/>
-            <a:ext cx="5477256" cy="2240280"/>
-          </a:xfrm>
-          <a:prstGeom prst="rect">
-            <a:avLst/>
-          </a:prstGeom>
-          <a:solidFill>
-            <a:srgbClr val="F3F7FF"/>
-          </a:solidFill>
-          <a:ln w="12700">
-            <a:solidFill>
-              <a:srgbClr val="C8D4EE"/>
-            </a:solidFill>
-          </a:ln>
-          <a:effectLst/>
-        </p:spPr>
-        <p:style>
-          <a:lnRef idx="1">
-            <a:schemeClr val="accent1"/>
-          </a:lnRef>
-          <a:fillRef idx="3">
-            <a:schemeClr val="accent1"/>
-          </a:fillRef>
-          <a:effectRef idx="2">
-            <a:schemeClr val="accent1"/>
-          </a:effectRef>
-          <a:fontRef idx="minor">
-            <a:schemeClr val="lt1"/>
-          </a:fontRef>
-        </p:style>
-        <p:txBody>
-          <a:bodyPr rtlCol="0" anchor="ctr"/>
-          <a:lstStyle/>
-          <a:p>
-            <a:pPr algn="ctr"/>
-          </a:p>
-        </p:txBody>
-      </p:sp>
-      <p:sp>
-        <p:nvSpPr>
-          <p:cNvPr id="20" name="Rectangle 19"/>
-          <p:cNvSpPr/>
-          <p:nvPr/>
-        </p:nvSpPr>
-        <p:spPr>
-          <a:xfrm>
-            <a:off x="6199632" y="3794760"/>
-            <a:ext cx="5477256" cy="64008"/>
-          </a:xfrm>
-          <a:prstGeom prst="rect">
-            <a:avLst/>
-          </a:prstGeom>
-          <a:solidFill>
-            <a:srgbClr val="3366CC"/>
-          </a:solidFill>
-          <a:ln>
-            <a:noFill/>
-          </a:ln>
-          <a:effectLst/>
-        </p:spPr>
-        <p:style>
-          <a:lnRef idx="1">
-            <a:schemeClr val="accent1"/>
-          </a:lnRef>
-          <a:fillRef idx="3">
-            <a:schemeClr val="accent1"/>
-          </a:fillRef>
-          <a:effectRef idx="2">
-            <a:schemeClr val="accent1"/>
-          </a:effectRef>
-          <a:fontRef idx="minor">
-            <a:schemeClr val="lt1"/>
-          </a:fontRef>
-        </p:style>
-        <p:txBody>
-          <a:bodyPr rtlCol="0" anchor="ctr"/>
-          <a:lstStyle/>
-          <a:p>
-            <a:pPr algn="ctr"/>
-          </a:p>
-        </p:txBody>
-      </p:sp>
-      <p:sp>
-        <p:nvSpPr>
-          <p:cNvPr id="21" name="TextBox 20"/>
-          <p:cNvSpPr txBox="1"/>
-          <p:nvPr/>
-        </p:nvSpPr>
-        <p:spPr>
-          <a:xfrm>
-            <a:off x="6473952" y="3995928"/>
-            <a:ext cx="4937760" cy="320040"/>
-          </a:xfrm>
-          <a:prstGeom prst="rect">
-            <a:avLst/>
-          </a:prstGeom>
-          <a:noFill/>
-        </p:spPr>
-        <p:txBody>
-          <a:bodyPr wrap="square" lIns="0" rIns="0" tIns="0" bIns="0">
-            <a:spAutoFit/>
-          </a:bodyPr>
-          <a:lstStyle/>
-          <a:p>
-            <a:pPr algn="l">
-              <a:lnSpc>
-                <a:spcPct val="115000"/>
-              </a:lnSpc>
-              <a:spcAft>
-                <a:spcPts val="600"/>
-              </a:spcAft>
-            </a:pPr>
-            <a:r>
-              <a:rPr sz="1500" b="1" i="0">
-                <a:solidFill>
-                  <a:srgbClr val="10245C"/>
-                </a:solidFill>
-                <a:latin typeface="Segoe UI"/>
-              </a:rPr>
-              <a:t>Power Factor Correction</a:t>
-            </a:r>
-          </a:p>
-        </p:txBody>
-      </p:sp>
-      <p:sp>
-        <p:nvSpPr>
-          <p:cNvPr id="22" name="TextBox 21"/>
-          <p:cNvSpPr txBox="1"/>
-          <p:nvPr/>
-        </p:nvSpPr>
-        <p:spPr>
-          <a:xfrm>
-            <a:off x="6473952" y="4434840"/>
-            <a:ext cx="4937760" cy="1463040"/>
-          </a:xfrm>
-          <a:prstGeom prst="rect">
-            <a:avLst/>
-          </a:prstGeom>
-          <a:noFill/>
-        </p:spPr>
-        <p:txBody>
-          <a:bodyPr wrap="square" lIns="0" rIns="0" tIns="0" bIns="0">
-            <a:spAutoFit/>
-          </a:bodyPr>
-          <a:lstStyle/>
-          <a:p>
-            <a:pPr algn="l">
-              <a:lnSpc>
-                <a:spcPct val="120000"/>
-              </a:lnSpc>
-              <a:spcAft>
-                <a:spcPts val="600"/>
-              </a:spcAft>
-            </a:pPr>
-            <a:r>
-              <a:rPr sz="1250" b="0" i="0">
-                <a:solidFill>
-                  <a:srgbClr val="1C1C1C"/>
-                </a:solidFill>
-                <a:latin typeface="Segoe UI"/>
-              </a:rPr>
-              <a:t>Continuous monitoring of reactive power (kVARh) maintains power factor above 0.95, avoiding utility penalty surcharges.</a:t>
-            </a:r>
-          </a:p>
-        </p:txBody>
-      </p:sp>
-      <p:sp>
-        <p:nvSpPr>
-          <p:cNvPr id="23" name="TextBox 22"/>
-          <p:cNvSpPr txBox="1"/>
-          <p:nvPr/>
-        </p:nvSpPr>
-        <p:spPr>
-          <a:xfrm>
-            <a:off x="502920" y="6437376"/>
-            <a:ext cx="8686800" cy="256032"/>
-          </a:xfrm>
-          <a:prstGeom prst="rect">
-            <a:avLst/>
-          </a:prstGeom>
-          <a:noFill/>
-        </p:spPr>
-        <p:txBody>
-          <a:bodyPr wrap="square" lIns="0" rIns="0" tIns="0" bIns="0">
-            <a:spAutoFit/>
-          </a:bodyPr>
-          <a:lstStyle/>
-          <a:p>
-            <a:pPr algn="l">
-              <a:lnSpc>
-                <a:spcPct val="115000"/>
-              </a:lnSpc>
-              <a:spcAft>
-                <a:spcPts val="600"/>
-              </a:spcAft>
-            </a:pPr>
-            <a:r>
               <a:rPr sz="900" b="0" i="0">
                 <a:solidFill>
                   <a:srgbClr val="555555"/>
@@ -10021,7 +10179,7 @@
       </p:sp>
       <p:sp>
         <p:nvSpPr>
-          <p:cNvPr id="24" name="TextBox 23"/>
+          <p:cNvPr id="16" name="TextBox 15"/>
           <p:cNvSpPr txBox="1"/>
           <p:nvPr/>
         </p:nvSpPr>
@@ -10246,7 +10404,7 @@
                 </a:solidFill>
                 <a:latin typeface="Segoe UI"/>
               </a:rPr>
-              <a:t>Project Summary &amp; Quantitative Achievements</a:t>
+              <a:t>Cloud Production Deployment &amp; Continuous Integration</a:t>
             </a:r>
           </a:p>
         </p:txBody>
@@ -10304,7 +10462,7 @@
         <p:spPr>
           <a:xfrm>
             <a:off x="502920" y="1261872"/>
-            <a:ext cx="11173968" cy="4892040"/>
+            <a:ext cx="5477256" cy="4892040"/>
           </a:xfrm>
           <a:prstGeom prst="rect">
             <a:avLst/>
@@ -10350,13 +10508,13 @@
         <p:spPr>
           <a:xfrm>
             <a:off x="502920" y="1261872"/>
-            <a:ext cx="11173968" cy="64008"/>
+            <a:ext cx="5477256" cy="64008"/>
           </a:xfrm>
           <a:prstGeom prst="rect">
             <a:avLst/>
           </a:prstGeom>
           <a:solidFill>
-            <a:srgbClr val="10245C"/>
+            <a:srgbClr val="3366CC"/>
           </a:solidFill>
           <a:ln>
             <a:noFill/>
@@ -10393,8 +10551,8 @@
         </p:nvSpPr>
         <p:spPr>
           <a:xfrm>
-            <a:off x="822960" y="1536192"/>
-            <a:ext cx="10515600" cy="320040"/>
+            <a:off x="777240" y="1508760"/>
+            <a:ext cx="4937760" cy="274320"/>
           </a:xfrm>
           <a:prstGeom prst="rect">
             <a:avLst/>
@@ -10416,27 +10574,236 @@
               </a:spcAft>
             </a:pPr>
             <a:r>
-              <a:rPr sz="1300" b="1" i="0">
+              <a:rPr sz="1150" b="1" i="0">
+                <a:solidFill>
+                  <a:srgbClr val="3366CC"/>
+                </a:solidFill>
+                <a:latin typeface="Segoe UI"/>
+              </a:rPr>
+              <a:t>VERCEL EDGE SERVERLESS PLATFORM</a:t>
+            </a:r>
+          </a:p>
+        </p:txBody>
+      </p:sp>
+      <p:sp>
+        <p:nvSpPr>
+          <p:cNvPr id="10" name="TextBox 9"/>
+          <p:cNvSpPr txBox="1"/>
+          <p:nvPr/>
+        </p:nvSpPr>
+        <p:spPr>
+          <a:xfrm>
+            <a:off x="777240" y="1874519"/>
+            <a:ext cx="4937760" cy="4114800"/>
+          </a:xfrm>
+          <a:prstGeom prst="rect">
+            <a:avLst/>
+          </a:prstGeom>
+          <a:noFill/>
+        </p:spPr>
+        <p:txBody>
+          <a:bodyPr wrap="square" lIns="0" rIns="0" tIns="0" bIns="0">
+            <a:spAutoFit/>
+          </a:bodyPr>
+          <a:lstStyle/>
+          <a:p/>
+          <a:p>
+            <a:pPr>
+              <a:lnSpc>
+                <a:spcPct val="118000"/>
+              </a:lnSpc>
+              <a:spcAft>
+                <a:spcPts val="1000"/>
+              </a:spcAft>
+            </a:pPr>
+            <a:r>
+              <a:rPr sz="1100">
+                <a:solidFill>
+                  <a:srgbClr val="3366CC"/>
+                </a:solidFill>
+                <a:latin typeface="Segoe UI"/>
+              </a:rPr>
+              <a:t>▪   </a:t>
+            </a:r>
+            <a:r>
+              <a:rPr sz="1100" b="1">
                 <a:solidFill>
                   <a:srgbClr val="10245C"/>
                 </a:solidFill>
                 <a:latin typeface="Segoe UI"/>
               </a:rPr>
-              <a:t>KEY QUANTITATIVE DELIVERABLES (FY 2025)</a:t>
-            </a:r>
-          </a:p>
-        </p:txBody>
-      </p:sp>
-      <p:sp>
-        <p:nvSpPr>
-          <p:cNvPr id="10" name="Rectangle 9"/>
+              <a:t>Live Production Deployment - </a:t>
+            </a:r>
+            <a:r>
+              <a:rPr sz="1100">
+                <a:solidFill>
+                  <a:srgbClr val="1C1C1C"/>
+                </a:solidFill>
+                <a:latin typeface="Segoe UI"/>
+              </a:rPr>
+              <a:t>Publicly accessible worldwide at https://webdashboard-eta.vercel.app with zero cold-starts and global CDN caching.</a:t>
+            </a:r>
+          </a:p>
+          <a:p>
+            <a:pPr>
+              <a:lnSpc>
+                <a:spcPct val="118000"/>
+              </a:lnSpc>
+              <a:spcAft>
+                <a:spcPts val="1000"/>
+              </a:spcAft>
+            </a:pPr>
+            <a:r>
+              <a:rPr sz="1100">
+                <a:solidFill>
+                  <a:srgbClr val="3366CC"/>
+                </a:solidFill>
+                <a:latin typeface="Segoe UI"/>
+              </a:rPr>
+              <a:t>▪   </a:t>
+            </a:r>
+            <a:r>
+              <a:rPr sz="1100" b="1">
+                <a:solidFill>
+                  <a:srgbClr val="10245C"/>
+                </a:solidFill>
+                <a:latin typeface="Segoe UI"/>
+              </a:rPr>
+              <a:t>Dual-Platform Delivery - </a:t>
+            </a:r>
+            <a:r>
+              <a:rPr sz="1100">
+                <a:solidFill>
+                  <a:srgbClr val="1C1C1C"/>
+                </a:solidFill>
+                <a:latin typeface="Segoe UI"/>
+              </a:rPr>
+              <a:t>Eliminates software dependency barriers: Power BI Desktop for offline analysts; responsive Web App for browser &amp; mobile access.</a:t>
+            </a:r>
+          </a:p>
+          <a:p>
+            <a:pPr>
+              <a:lnSpc>
+                <a:spcPct val="118000"/>
+              </a:lnSpc>
+              <a:spcAft>
+                <a:spcPts val="1000"/>
+              </a:spcAft>
+            </a:pPr>
+            <a:r>
+              <a:rPr sz="1100">
+                <a:solidFill>
+                  <a:srgbClr val="3366CC"/>
+                </a:solidFill>
+                <a:latin typeface="Segoe UI"/>
+              </a:rPr>
+              <a:t>▪   </a:t>
+            </a:r>
+            <a:r>
+              <a:rPr sz="1100" b="1">
+                <a:solidFill>
+                  <a:srgbClr val="10245C"/>
+                </a:solidFill>
+                <a:latin typeface="Segoe UI"/>
+              </a:rPr>
+              <a:t>Cyber-Slate Glassmorphism - </a:t>
+            </a:r>
+            <a:r>
+              <a:rPr sz="1100">
+                <a:solidFill>
+                  <a:srgbClr val="1C1C1C"/>
+                </a:solidFill>
+                <a:latin typeface="Segoe UI"/>
+              </a:rPr>
+              <a:t>High-contrast palette (#0b1120 background, #f8fafc text) exceeding WCAG AA standards with fluid micro-animations.</a:t>
+            </a:r>
+          </a:p>
+          <a:p>
+            <a:pPr>
+              <a:lnSpc>
+                <a:spcPct val="118000"/>
+              </a:lnSpc>
+              <a:spcAft>
+                <a:spcPts val="1000"/>
+              </a:spcAft>
+            </a:pPr>
+            <a:r>
+              <a:rPr sz="1100">
+                <a:solidFill>
+                  <a:srgbClr val="3366CC"/>
+                </a:solidFill>
+                <a:latin typeface="Segoe UI"/>
+              </a:rPr>
+              <a:t>▪   </a:t>
+            </a:r>
+            <a:r>
+              <a:rPr sz="1100" b="1">
+                <a:solidFill>
+                  <a:srgbClr val="10245C"/>
+                </a:solidFill>
+                <a:latin typeface="Segoe UI"/>
+              </a:rPr>
+              <a:t>8 Synchronized ECharts - </a:t>
+            </a:r>
+            <a:r>
+              <a:rPr sz="1100">
+                <a:solidFill>
+                  <a:srgbClr val="1C1C1C"/>
+                </a:solidFill>
+                <a:latin typeface="Segoe UI"/>
+              </a:rPr>
+              <a:t>Diurnal flow, 24x7 matrix heatmap, facility benchmarking, Prophet forecast, Shewhart control limits, t-SNE 2D manifold, and submetering.</a:t>
+            </a:r>
+          </a:p>
+          <a:p>
+            <a:pPr>
+              <a:lnSpc>
+                <a:spcPct val="118000"/>
+              </a:lnSpc>
+              <a:spcAft>
+                <a:spcPts val="1000"/>
+              </a:spcAft>
+            </a:pPr>
+            <a:r>
+              <a:rPr sz="1100">
+                <a:solidFill>
+                  <a:srgbClr val="3366CC"/>
+                </a:solidFill>
+                <a:latin typeface="Segoe UI"/>
+              </a:rPr>
+              <a:t>▪   </a:t>
+            </a:r>
+            <a:r>
+              <a:rPr sz="1100" b="1">
+                <a:solidFill>
+                  <a:srgbClr val="10245C"/>
+                </a:solidFill>
+                <a:latin typeface="Segoe UI"/>
+              </a:rPr>
+              <a:t>Cache-Control Architecture - </a:t>
+            </a:r>
+            <a:r>
+              <a:rPr sz="1100">
+                <a:solidFill>
+                  <a:srgbClr val="1C1C1C"/>
+                </a:solidFill>
+                <a:latin typeface="Segoe UI"/>
+              </a:rPr>
+              <a:t>Automated zero-cache headers (max-age=0, must-revalidate) preventing stale analytical assets across edge nodes.</a:t>
+            </a:r>
+          </a:p>
+        </p:txBody>
+      </p:sp>
+      <p:sp>
+        <p:nvSpPr>
+          <p:cNvPr id="11" name="Rectangle 10"/>
           <p:cNvSpPr/>
           <p:nvPr/>
         </p:nvSpPr>
         <p:spPr>
           <a:xfrm>
-            <a:off x="822960" y="1965960"/>
-            <a:ext cx="5120640" cy="822960"/>
+            <a:off x="6199632" y="1261872"/>
+            <a:ext cx="5477256" cy="4892040"/>
           </a:xfrm>
           <a:prstGeom prst="rect">
             <a:avLst/>
@@ -10475,14 +10842,455 @@
       </p:sp>
       <p:sp>
         <p:nvSpPr>
-          <p:cNvPr id="11" name="Rectangle 10"/>
+          <p:cNvPr id="12" name="Rectangle 11"/>
           <p:cNvSpPr/>
           <p:nvPr/>
         </p:nvSpPr>
         <p:spPr>
           <a:xfrm>
-            <a:off x="822960" y="1965960"/>
-            <a:ext cx="73152" cy="822960"/>
+            <a:off x="6199632" y="1261872"/>
+            <a:ext cx="5477256" cy="64008"/>
+          </a:xfrm>
+          <a:prstGeom prst="rect">
+            <a:avLst/>
+          </a:prstGeom>
+          <a:solidFill>
+            <a:srgbClr val="1E7A4F"/>
+          </a:solidFill>
+          <a:ln>
+            <a:noFill/>
+          </a:ln>
+          <a:effectLst/>
+        </p:spPr>
+        <p:style>
+          <a:lnRef idx="1">
+            <a:schemeClr val="accent1"/>
+          </a:lnRef>
+          <a:fillRef idx="3">
+            <a:schemeClr val="accent1"/>
+          </a:fillRef>
+          <a:effectRef idx="2">
+            <a:schemeClr val="accent1"/>
+          </a:effectRef>
+          <a:fontRef idx="minor">
+            <a:schemeClr val="lt1"/>
+          </a:fontRef>
+        </p:style>
+        <p:txBody>
+          <a:bodyPr rtlCol="0" anchor="ctr"/>
+          <a:lstStyle/>
+          <a:p>
+            <a:pPr algn="ctr"/>
+          </a:p>
+        </p:txBody>
+      </p:sp>
+      <p:sp>
+        <p:nvSpPr>
+          <p:cNvPr id="13" name="TextBox 12"/>
+          <p:cNvSpPr txBox="1"/>
+          <p:nvPr/>
+        </p:nvSpPr>
+        <p:spPr>
+          <a:xfrm>
+            <a:off x="6492240" y="1508760"/>
+            <a:ext cx="4937760" cy="274320"/>
+          </a:xfrm>
+          <a:prstGeom prst="rect">
+            <a:avLst/>
+          </a:prstGeom>
+          <a:noFill/>
+        </p:spPr>
+        <p:txBody>
+          <a:bodyPr wrap="square" lIns="0" rIns="0" tIns="0" bIns="0">
+            <a:spAutoFit/>
+          </a:bodyPr>
+          <a:lstStyle/>
+          <a:p>
+            <a:pPr algn="l">
+              <a:lnSpc>
+                <a:spcPct val="115000"/>
+              </a:lnSpc>
+              <a:spcAft>
+                <a:spcPts val="600"/>
+              </a:spcAft>
+            </a:pPr>
+            <a:r>
+              <a:rPr sz="1150" b="1" i="0">
+                <a:solidFill>
+                  <a:srgbClr val="1E7A4F"/>
+                </a:solidFill>
+                <a:latin typeface="Segoe UI"/>
+              </a:rPr>
+              <a:t>GITHUB CI/CD &amp; TELEMETRY INTEGRATION</a:t>
+            </a:r>
+          </a:p>
+        </p:txBody>
+      </p:sp>
+      <p:sp>
+        <p:nvSpPr>
+          <p:cNvPr id="14" name="TextBox 13"/>
+          <p:cNvSpPr txBox="1"/>
+          <p:nvPr/>
+        </p:nvSpPr>
+        <p:spPr>
+          <a:xfrm>
+            <a:off x="6492240" y="1874519"/>
+            <a:ext cx="4937760" cy="4114800"/>
+          </a:xfrm>
+          <a:prstGeom prst="rect">
+            <a:avLst/>
+          </a:prstGeom>
+          <a:noFill/>
+        </p:spPr>
+        <p:txBody>
+          <a:bodyPr wrap="square" lIns="0" rIns="0" tIns="0" bIns="0">
+            <a:spAutoFit/>
+          </a:bodyPr>
+          <a:lstStyle/>
+          <a:p/>
+          <a:p>
+            <a:pPr>
+              <a:lnSpc>
+                <a:spcPct val="118000"/>
+              </a:lnSpc>
+              <a:spcAft>
+                <a:spcPts val="1000"/>
+              </a:spcAft>
+            </a:pPr>
+            <a:r>
+              <a:rPr sz="1100">
+                <a:solidFill>
+                  <a:srgbClr val="3366CC"/>
+                </a:solidFill>
+                <a:latin typeface="Segoe UI"/>
+              </a:rPr>
+              <a:t>▪   </a:t>
+            </a:r>
+            <a:r>
+              <a:rPr sz="1100" b="1">
+                <a:solidFill>
+                  <a:srgbClr val="10245C"/>
+                </a:solidFill>
+                <a:latin typeface="Segoe UI"/>
+              </a:rPr>
+              <a:t>Automated Git Versioning - </a:t>
+            </a:r>
+            <a:r>
+              <a:rPr sz="1100">
+                <a:solidFill>
+                  <a:srgbClr val="1C1C1C"/>
+                </a:solidFill>
+                <a:latin typeface="Segoe UI"/>
+              </a:rPr>
+              <a:t>Complete project hosted at https://github.com/adminsharpcode/visual-analytics-lab with clean modular commit history.</a:t>
+            </a:r>
+          </a:p>
+          <a:p>
+            <a:pPr>
+              <a:lnSpc>
+                <a:spcPct val="118000"/>
+              </a:lnSpc>
+              <a:spcAft>
+                <a:spcPts val="1000"/>
+              </a:spcAft>
+            </a:pPr>
+            <a:r>
+              <a:rPr sz="1100">
+                <a:solidFill>
+                  <a:srgbClr val="3366CC"/>
+                </a:solidFill>
+                <a:latin typeface="Segoe UI"/>
+              </a:rPr>
+              <a:t>▪   </a:t>
+            </a:r>
+            <a:r>
+              <a:rPr sz="1100" b="1">
+                <a:solidFill>
+                  <a:srgbClr val="10245C"/>
+                </a:solidFill>
+                <a:latin typeface="Segoe UI"/>
+              </a:rPr>
+              <a:t>Self-Contained Data Warehouse - </a:t>
+            </a:r>
+            <a:r>
+              <a:rPr sz="1100">
+                <a:solidFill>
+                  <a:srgbClr val="1C1C1C"/>
+                </a:solidFill>
+                <a:latin typeface="Segoe UI"/>
+              </a:rPr>
+              <a:t>All 11 star schema CSVs (52.5k rows), ETL modules, and analytics scripts fully reproducible in single clone.</a:t>
+            </a:r>
+          </a:p>
+          <a:p>
+            <a:pPr>
+              <a:lnSpc>
+                <a:spcPct val="118000"/>
+              </a:lnSpc>
+              <a:spcAft>
+                <a:spcPts val="1000"/>
+              </a:spcAft>
+            </a:pPr>
+            <a:r>
+              <a:rPr sz="1100">
+                <a:solidFill>
+                  <a:srgbClr val="3366CC"/>
+                </a:solidFill>
+                <a:latin typeface="Segoe UI"/>
+              </a:rPr>
+              <a:t>▪   </a:t>
+            </a:r>
+            <a:r>
+              <a:rPr sz="1100" b="1">
+                <a:solidFill>
+                  <a:srgbClr val="10245C"/>
+                </a:solidFill>
+                <a:latin typeface="Segoe UI"/>
+              </a:rPr>
+              <a:t>Live Telemetry Emulation - </a:t>
+            </a:r>
+            <a:r>
+              <a:rPr sz="1100">
+                <a:solidFill>
+                  <a:srgbClr val="1C1C1C"/>
+                </a:solidFill>
+                <a:latin typeface="Segoe UI"/>
+              </a:rPr>
+              <a:t>Continuous ESP32 MQTT simulation engine pushing instantaneous 3-phase readings with dynamic voltage fluctuation.</a:t>
+            </a:r>
+          </a:p>
+          <a:p>
+            <a:pPr>
+              <a:lnSpc>
+                <a:spcPct val="118000"/>
+              </a:lnSpc>
+              <a:spcAft>
+                <a:spcPts val="1000"/>
+              </a:spcAft>
+            </a:pPr>
+            <a:r>
+              <a:rPr sz="1100">
+                <a:solidFill>
+                  <a:srgbClr val="3366CC"/>
+                </a:solidFill>
+                <a:latin typeface="Segoe UI"/>
+              </a:rPr>
+              <a:t>▪   </a:t>
+            </a:r>
+            <a:r>
+              <a:rPr sz="1100" b="1">
+                <a:solidFill>
+                  <a:srgbClr val="10245C"/>
+                </a:solidFill>
+                <a:latin typeface="Segoe UI"/>
+              </a:rPr>
+              <a:t>Academic Integrity &amp; Compliance - </a:t>
+            </a:r>
+            <a:r>
+              <a:rPr sz="1100">
+                <a:solidFill>
+                  <a:srgbClr val="1C1C1C"/>
+                </a:solidFill>
+                <a:latin typeface="Segoe UI"/>
+              </a:rPr>
+              <a:t>Fully documented research methodology referencing all 6 core papers with reproducible benchmark scripts.</a:t>
+            </a:r>
+          </a:p>
+          <a:p>
+            <a:pPr>
+              <a:lnSpc>
+                <a:spcPct val="118000"/>
+              </a:lnSpc>
+              <a:spcAft>
+                <a:spcPts val="1000"/>
+              </a:spcAft>
+            </a:pPr>
+            <a:r>
+              <a:rPr sz="1100">
+                <a:solidFill>
+                  <a:srgbClr val="3366CC"/>
+                </a:solidFill>
+                <a:latin typeface="Segoe UI"/>
+              </a:rPr>
+              <a:t>▪   </a:t>
+            </a:r>
+            <a:r>
+              <a:rPr sz="1100" b="1">
+                <a:solidFill>
+                  <a:srgbClr val="10245C"/>
+                </a:solidFill>
+                <a:latin typeface="Segoe UI"/>
+              </a:rPr>
+              <a:t>Production Artifacts - </a:t>
+            </a:r>
+            <a:r>
+              <a:rPr sz="1100">
+                <a:solidFill>
+                  <a:srgbClr val="1C1C1C"/>
+                </a:solidFill>
+                <a:latin typeface="Segoe UI"/>
+              </a:rPr>
+              <a:t>Includes automated PDF generation script, defense PPT presentation deck, and interactive web dashboard server.</a:t>
+            </a:r>
+          </a:p>
+        </p:txBody>
+      </p:sp>
+      <p:sp>
+        <p:nvSpPr>
+          <p:cNvPr id="15" name="TextBox 14"/>
+          <p:cNvSpPr txBox="1"/>
+          <p:nvPr/>
+        </p:nvSpPr>
+        <p:spPr>
+          <a:xfrm>
+            <a:off x="502920" y="6437376"/>
+            <a:ext cx="8686800" cy="256032"/>
+          </a:xfrm>
+          <a:prstGeom prst="rect">
+            <a:avLst/>
+          </a:prstGeom>
+          <a:noFill/>
+        </p:spPr>
+        <p:txBody>
+          <a:bodyPr wrap="square" lIns="0" rIns="0" tIns="0" bIns="0">
+            <a:spAutoFit/>
+          </a:bodyPr>
+          <a:lstStyle/>
+          <a:p>
+            <a:pPr algn="l">
+              <a:lnSpc>
+                <a:spcPct val="115000"/>
+              </a:lnSpc>
+              <a:spcAft>
+                <a:spcPts val="600"/>
+              </a:spcAft>
+            </a:pPr>
+            <a:r>
+              <a:rPr sz="900" b="0" i="0">
+                <a:solidFill>
+                  <a:srgbClr val="555555"/>
+                </a:solidFill>
+                <a:latin typeface="Segoe UI"/>
+              </a:rPr>
+              <a:t>MACSE603 - Visual Analytics Lab  |  Smart Energy Consumption Visualization Dashboard Using Power BI &amp; IoT Pipelines</a:t>
+            </a:r>
+          </a:p>
+        </p:txBody>
+      </p:sp>
+      <p:sp>
+        <p:nvSpPr>
+          <p:cNvPr id="16" name="TextBox 15"/>
+          <p:cNvSpPr txBox="1"/>
+          <p:nvPr/>
+        </p:nvSpPr>
+        <p:spPr>
+          <a:xfrm>
+            <a:off x="11064240" y="6437376"/>
+            <a:ext cx="640080" cy="256032"/>
+          </a:xfrm>
+          <a:prstGeom prst="rect">
+            <a:avLst/>
+          </a:prstGeom>
+          <a:noFill/>
+        </p:spPr>
+        <p:txBody>
+          <a:bodyPr wrap="square" lIns="0" rIns="0" tIns="0" bIns="0">
+            <a:spAutoFit/>
+          </a:bodyPr>
+          <a:lstStyle/>
+          <a:p>
+            <a:pPr algn="r">
+              <a:lnSpc>
+                <a:spcPct val="115000"/>
+              </a:lnSpc>
+              <a:spcAft>
+                <a:spcPts val="600"/>
+              </a:spcAft>
+            </a:pPr>
+            <a:r>
+              <a:rPr sz="900" b="1" i="0">
+                <a:solidFill>
+                  <a:srgbClr val="3366CC"/>
+                </a:solidFill>
+                <a:latin typeface="Segoe UI"/>
+              </a:rPr>
+              <a:t>15</a:t>
+            </a:r>
+          </a:p>
+        </p:txBody>
+      </p:sp>
+    </p:spTree>
+  </p:cSld>
+  <p:clrMapOvr>
+    <a:masterClrMapping/>
+  </p:clrMapOvr>
+</p:sld>
+</file>
+
+<file path=ppt/slides/slide17.xml><?xml version="1.0" encoding="utf-8"?>
+<p:sld xmlns:a="http://schemas.openxmlformats.org/drawingml/2006/main" xmlns:p="http://schemas.openxmlformats.org/presentationml/2006/main" xmlns:r="http://schemas.openxmlformats.org/officeDocument/2006/relationships">
+  <p:cSld>
+    <p:spTree>
+      <p:nvGrpSpPr>
+        <p:cNvPr id="1" name=""/>
+        <p:cNvGrpSpPr/>
+        <p:nvPr/>
+      </p:nvGrpSpPr>
+      <p:grpSpPr/>
+      <p:sp>
+        <p:nvSpPr>
+          <p:cNvPr id="2" name="Rectangle 1"/>
+          <p:cNvSpPr/>
+          <p:nvPr/>
+        </p:nvSpPr>
+        <p:spPr>
+          <a:xfrm>
+            <a:off x="0" y="0"/>
+            <a:ext cx="12191695" cy="128016"/>
+          </a:xfrm>
+          <a:prstGeom prst="rect">
+            <a:avLst/>
+          </a:prstGeom>
+          <a:solidFill>
+            <a:srgbClr val="10245C"/>
+          </a:solidFill>
+          <a:ln>
+            <a:noFill/>
+          </a:ln>
+          <a:effectLst/>
+        </p:spPr>
+        <p:style>
+          <a:lnRef idx="1">
+            <a:schemeClr val="accent1"/>
+          </a:lnRef>
+          <a:fillRef idx="3">
+            <a:schemeClr val="accent1"/>
+          </a:fillRef>
+          <a:effectRef idx="2">
+            <a:schemeClr val="accent1"/>
+          </a:effectRef>
+          <a:fontRef idx="minor">
+            <a:schemeClr val="lt1"/>
+          </a:fontRef>
+        </p:style>
+        <p:txBody>
+          <a:bodyPr rtlCol="0" anchor="ctr"/>
+          <a:lstStyle/>
+          <a:p>
+            <a:pPr algn="ctr"/>
+          </a:p>
+        </p:txBody>
+      </p:sp>
+      <p:sp>
+        <p:nvSpPr>
+          <p:cNvPr id="3" name="Rectangle 2"/>
+          <p:cNvSpPr/>
+          <p:nvPr/>
+        </p:nvSpPr>
+        <p:spPr>
+          <a:xfrm>
+            <a:off x="502920" y="329184"/>
+            <a:ext cx="566928" cy="566928"/>
           </a:xfrm>
           <a:prstGeom prst="rect">
             <a:avLst/>
@@ -10519,14 +11327,14 @@
       </p:sp>
       <p:sp>
         <p:nvSpPr>
-          <p:cNvPr id="12" name="TextBox 11"/>
+          <p:cNvPr id="4" name="TextBox 3"/>
           <p:cNvSpPr txBox="1"/>
           <p:nvPr/>
         </p:nvSpPr>
         <p:spPr>
           <a:xfrm>
-            <a:off x="1005840" y="2075688"/>
-            <a:ext cx="2194560" cy="320040"/>
+            <a:off x="502920" y="429768"/>
+            <a:ext cx="566928" cy="365760"/>
           </a:xfrm>
           <a:prstGeom prst="rect">
             <a:avLst/>
@@ -10539,7 +11347,7 @@
           </a:bodyPr>
           <a:lstStyle/>
           <a:p>
-            <a:pPr algn="l">
+            <a:pPr algn="ctr">
               <a:lnSpc>
                 <a:spcPct val="115000"/>
               </a:lnSpc>
@@ -10548,27 +11356,27 @@
               </a:spcAft>
             </a:pPr>
             <a:r>
-              <a:rPr sz="1000" b="1" i="0">
-                <a:solidFill>
-                  <a:srgbClr val="555555"/>
-                </a:solidFill>
-                <a:latin typeface="Segoe UI"/>
-              </a:rPr>
-              <a:t>Total Active Energy</a:t>
-            </a:r>
-          </a:p>
-        </p:txBody>
-      </p:sp>
-      <p:sp>
-        <p:nvSpPr>
-          <p:cNvPr id="13" name="TextBox 12"/>
+              <a:rPr sz="1900" b="1" i="0">
+                <a:solidFill>
+                  <a:srgbClr val="FFFFFF"/>
+                </a:solidFill>
+                <a:latin typeface="Segoe UI"/>
+              </a:rPr>
+              <a:t>17</a:t>
+            </a:r>
+          </a:p>
+        </p:txBody>
+      </p:sp>
+      <p:sp>
+        <p:nvSpPr>
+          <p:cNvPr id="5" name="TextBox 4"/>
           <p:cNvSpPr txBox="1"/>
           <p:nvPr/>
         </p:nvSpPr>
         <p:spPr>
           <a:xfrm>
-            <a:off x="1005840" y="2350008"/>
-            <a:ext cx="2194560" cy="365760"/>
+            <a:off x="1234440" y="384048"/>
+            <a:ext cx="10424160" cy="548640"/>
           </a:xfrm>
           <a:prstGeom prst="rect">
             <a:avLst/>
@@ -10590,27 +11398,161 @@
               </a:spcAft>
             </a:pPr>
             <a:r>
-              <a:rPr sz="1600" b="1" i="0">
+              <a:rPr sz="2500" b="1" i="0">
                 <a:solidFill>
                   <a:srgbClr val="10245C"/>
                 </a:solidFill>
                 <a:latin typeface="Segoe UI"/>
               </a:rPr>
-              <a:t>19.35 GWh</a:t>
-            </a:r>
-          </a:p>
-        </p:txBody>
-      </p:sp>
-      <p:sp>
-        <p:nvSpPr>
-          <p:cNvPr id="14" name="TextBox 13"/>
+              <a:t>Decision Support &amp; Financial Impact</a:t>
+            </a:r>
+          </a:p>
+        </p:txBody>
+      </p:sp>
+      <p:sp>
+        <p:nvSpPr>
+          <p:cNvPr id="6" name="Rectangle 5"/>
+          <p:cNvSpPr/>
+          <p:nvPr/>
+        </p:nvSpPr>
+        <p:spPr>
+          <a:xfrm>
+            <a:off x="1234440" y="1014984"/>
+            <a:ext cx="1051560" cy="45720"/>
+          </a:xfrm>
+          <a:prstGeom prst="rect">
+            <a:avLst/>
+          </a:prstGeom>
+          <a:solidFill>
+            <a:srgbClr val="3366CC"/>
+          </a:solidFill>
+          <a:ln>
+            <a:noFill/>
+          </a:ln>
+          <a:effectLst/>
+        </p:spPr>
+        <p:style>
+          <a:lnRef idx="1">
+            <a:schemeClr val="accent1"/>
+          </a:lnRef>
+          <a:fillRef idx="3">
+            <a:schemeClr val="accent1"/>
+          </a:fillRef>
+          <a:effectRef idx="2">
+            <a:schemeClr val="accent1"/>
+          </a:effectRef>
+          <a:fontRef idx="minor">
+            <a:schemeClr val="lt1"/>
+          </a:fontRef>
+        </p:style>
+        <p:txBody>
+          <a:bodyPr rtlCol="0" anchor="ctr"/>
+          <a:lstStyle/>
+          <a:p>
+            <a:pPr algn="ctr"/>
+          </a:p>
+        </p:txBody>
+      </p:sp>
+      <p:sp>
+        <p:nvSpPr>
+          <p:cNvPr id="7" name="Rectangle 6"/>
+          <p:cNvSpPr/>
+          <p:nvPr/>
+        </p:nvSpPr>
+        <p:spPr>
+          <a:xfrm>
+            <a:off x="502920" y="1371600"/>
+            <a:ext cx="5477256" cy="2240280"/>
+          </a:xfrm>
+          <a:prstGeom prst="rect">
+            <a:avLst/>
+          </a:prstGeom>
+          <a:solidFill>
+            <a:srgbClr val="F3F7FF"/>
+          </a:solidFill>
+          <a:ln w="12700">
+            <a:solidFill>
+              <a:srgbClr val="C8D4EE"/>
+            </a:solidFill>
+          </a:ln>
+          <a:effectLst/>
+        </p:spPr>
+        <p:style>
+          <a:lnRef idx="1">
+            <a:schemeClr val="accent1"/>
+          </a:lnRef>
+          <a:fillRef idx="3">
+            <a:schemeClr val="accent1"/>
+          </a:fillRef>
+          <a:effectRef idx="2">
+            <a:schemeClr val="accent1"/>
+          </a:effectRef>
+          <a:fontRef idx="minor">
+            <a:schemeClr val="lt1"/>
+          </a:fontRef>
+        </p:style>
+        <p:txBody>
+          <a:bodyPr rtlCol="0" anchor="ctr"/>
+          <a:lstStyle/>
+          <a:p>
+            <a:pPr algn="ctr"/>
+          </a:p>
+        </p:txBody>
+      </p:sp>
+      <p:sp>
+        <p:nvSpPr>
+          <p:cNvPr id="8" name="Rectangle 7"/>
+          <p:cNvSpPr/>
+          <p:nvPr/>
+        </p:nvSpPr>
+        <p:spPr>
+          <a:xfrm>
+            <a:off x="502920" y="1371600"/>
+            <a:ext cx="5477256" cy="64008"/>
+          </a:xfrm>
+          <a:prstGeom prst="rect">
+            <a:avLst/>
+          </a:prstGeom>
+          <a:solidFill>
+            <a:srgbClr val="3366CC"/>
+          </a:solidFill>
+          <a:ln>
+            <a:noFill/>
+          </a:ln>
+          <a:effectLst/>
+        </p:spPr>
+        <p:style>
+          <a:lnRef idx="1">
+            <a:schemeClr val="accent1"/>
+          </a:lnRef>
+          <a:fillRef idx="3">
+            <a:schemeClr val="accent1"/>
+          </a:fillRef>
+          <a:effectRef idx="2">
+            <a:schemeClr val="accent1"/>
+          </a:effectRef>
+          <a:fontRef idx="minor">
+            <a:schemeClr val="lt1"/>
+          </a:fontRef>
+        </p:style>
+        <p:txBody>
+          <a:bodyPr rtlCol="0" anchor="ctr"/>
+          <a:lstStyle/>
+          <a:p>
+            <a:pPr algn="ctr"/>
+          </a:p>
+        </p:txBody>
+      </p:sp>
+      <p:sp>
+        <p:nvSpPr>
+          <p:cNvPr id="9" name="TextBox 8"/>
           <p:cNvSpPr txBox="1"/>
           <p:nvPr/>
         </p:nvSpPr>
         <p:spPr>
           <a:xfrm>
-            <a:off x="3291840" y="2148840"/>
-            <a:ext cx="2514600" cy="548640"/>
+            <a:off x="777240" y="1572768"/>
+            <a:ext cx="4937760" cy="320040"/>
           </a:xfrm>
           <a:prstGeom prst="rect">
             <a:avLst/>
@@ -10625,20 +11567,236 @@
           <a:p>
             <a:pPr algn="l">
               <a:lnSpc>
-                <a:spcPct val="110000"/>
+                <a:spcPct val="115000"/>
               </a:lnSpc>
               <a:spcAft>
                 <a:spcPts val="600"/>
               </a:spcAft>
             </a:pPr>
             <a:r>
-              <a:rPr sz="950" b="0" i="0">
+              <a:rPr sz="1500" b="1" i="0">
+                <a:solidFill>
+                  <a:srgbClr val="10245C"/>
+                </a:solidFill>
+                <a:latin typeface="Segoe UI"/>
+              </a:rPr>
+              <a:t>Peak Shaving Optimization</a:t>
+            </a:r>
+          </a:p>
+        </p:txBody>
+      </p:sp>
+      <p:sp>
+        <p:nvSpPr>
+          <p:cNvPr id="10" name="TextBox 9"/>
+          <p:cNvSpPr txBox="1"/>
+          <p:nvPr/>
+        </p:nvSpPr>
+        <p:spPr>
+          <a:xfrm>
+            <a:off x="777240" y="2011680"/>
+            <a:ext cx="4937760" cy="1463040"/>
+          </a:xfrm>
+          <a:prstGeom prst="rect">
+            <a:avLst/>
+          </a:prstGeom>
+          <a:noFill/>
+        </p:spPr>
+        <p:txBody>
+          <a:bodyPr wrap="square" lIns="0" rIns="0" tIns="0" bIns="0">
+            <a:spAutoFit/>
+          </a:bodyPr>
+          <a:lstStyle/>
+          <a:p>
+            <a:pPr algn="l">
+              <a:lnSpc>
+                <a:spcPct val="120000"/>
+              </a:lnSpc>
+              <a:spcAft>
+                <a:spcPts val="600"/>
+              </a:spcAft>
+            </a:pPr>
+            <a:r>
+              <a:rPr sz="1250" b="0" i="0">
                 <a:solidFill>
                   <a:srgbClr val="1C1C1C"/>
                 </a:solidFill>
                 <a:latin typeface="Segoe UI"/>
               </a:rPr>
-              <a:t>52,560 hourly metered readings across 6 campus facilities</a:t>
+              <a:t>Shifting HVAC load via 11:00-13:00 pre-cooling reduces contract demand by 15%, saving an estimated INR 18.5 Lakhs annually in tariff demand charges.</a:t>
+            </a:r>
+          </a:p>
+        </p:txBody>
+      </p:sp>
+      <p:sp>
+        <p:nvSpPr>
+          <p:cNvPr id="11" name="Rectangle 10"/>
+          <p:cNvSpPr/>
+          <p:nvPr/>
+        </p:nvSpPr>
+        <p:spPr>
+          <a:xfrm>
+            <a:off x="502920" y="3794760"/>
+            <a:ext cx="5477256" cy="2240280"/>
+          </a:xfrm>
+          <a:prstGeom prst="rect">
+            <a:avLst/>
+          </a:prstGeom>
+          <a:solidFill>
+            <a:srgbClr val="F3F7FF"/>
+          </a:solidFill>
+          <a:ln w="12700">
+            <a:solidFill>
+              <a:srgbClr val="C8D4EE"/>
+            </a:solidFill>
+          </a:ln>
+          <a:effectLst/>
+        </p:spPr>
+        <p:style>
+          <a:lnRef idx="1">
+            <a:schemeClr val="accent1"/>
+          </a:lnRef>
+          <a:fillRef idx="3">
+            <a:schemeClr val="accent1"/>
+          </a:fillRef>
+          <a:effectRef idx="2">
+            <a:schemeClr val="accent1"/>
+          </a:effectRef>
+          <a:fontRef idx="minor">
+            <a:schemeClr val="lt1"/>
+          </a:fontRef>
+        </p:style>
+        <p:txBody>
+          <a:bodyPr rtlCol="0" anchor="ctr"/>
+          <a:lstStyle/>
+          <a:p>
+            <a:pPr algn="ctr"/>
+          </a:p>
+        </p:txBody>
+      </p:sp>
+      <p:sp>
+        <p:nvSpPr>
+          <p:cNvPr id="12" name="Rectangle 11"/>
+          <p:cNvSpPr/>
+          <p:nvPr/>
+        </p:nvSpPr>
+        <p:spPr>
+          <a:xfrm>
+            <a:off x="502920" y="3794760"/>
+            <a:ext cx="5477256" cy="64008"/>
+          </a:xfrm>
+          <a:prstGeom prst="rect">
+            <a:avLst/>
+          </a:prstGeom>
+          <a:solidFill>
+            <a:srgbClr val="10245C"/>
+          </a:solidFill>
+          <a:ln>
+            <a:noFill/>
+          </a:ln>
+          <a:effectLst/>
+        </p:spPr>
+        <p:style>
+          <a:lnRef idx="1">
+            <a:schemeClr val="accent1"/>
+          </a:lnRef>
+          <a:fillRef idx="3">
+            <a:schemeClr val="accent1"/>
+          </a:fillRef>
+          <a:effectRef idx="2">
+            <a:schemeClr val="accent1"/>
+          </a:effectRef>
+          <a:fontRef idx="minor">
+            <a:schemeClr val="lt1"/>
+          </a:fontRef>
+        </p:style>
+        <p:txBody>
+          <a:bodyPr rtlCol="0" anchor="ctr"/>
+          <a:lstStyle/>
+          <a:p>
+            <a:pPr algn="ctr"/>
+          </a:p>
+        </p:txBody>
+      </p:sp>
+      <p:sp>
+        <p:nvSpPr>
+          <p:cNvPr id="13" name="TextBox 12"/>
+          <p:cNvSpPr txBox="1"/>
+          <p:nvPr/>
+        </p:nvSpPr>
+        <p:spPr>
+          <a:xfrm>
+            <a:off x="777240" y="3995928"/>
+            <a:ext cx="4937760" cy="320040"/>
+          </a:xfrm>
+          <a:prstGeom prst="rect">
+            <a:avLst/>
+          </a:prstGeom>
+          <a:noFill/>
+        </p:spPr>
+        <p:txBody>
+          <a:bodyPr wrap="square" lIns="0" rIns="0" tIns="0" bIns="0">
+            <a:spAutoFit/>
+          </a:bodyPr>
+          <a:lstStyle/>
+          <a:p>
+            <a:pPr algn="l">
+              <a:lnSpc>
+                <a:spcPct val="115000"/>
+              </a:lnSpc>
+              <a:spcAft>
+                <a:spcPts val="600"/>
+              </a:spcAft>
+            </a:pPr>
+            <a:r>
+              <a:rPr sz="1500" b="1" i="0">
+                <a:solidFill>
+                  <a:srgbClr val="10245C"/>
+                </a:solidFill>
+                <a:latin typeface="Segoe UI"/>
+              </a:rPr>
+              <a:t>Weekend Equipment Shutdown</a:t>
+            </a:r>
+          </a:p>
+        </p:txBody>
+      </p:sp>
+      <p:sp>
+        <p:nvSpPr>
+          <p:cNvPr id="14" name="TextBox 13"/>
+          <p:cNvSpPr txBox="1"/>
+          <p:nvPr/>
+        </p:nvSpPr>
+        <p:spPr>
+          <a:xfrm>
+            <a:off x="777240" y="4434840"/>
+            <a:ext cx="4937760" cy="1463040"/>
+          </a:xfrm>
+          <a:prstGeom prst="rect">
+            <a:avLst/>
+          </a:prstGeom>
+          <a:noFill/>
+        </p:spPr>
+        <p:txBody>
+          <a:bodyPr wrap="square" lIns="0" rIns="0" tIns="0" bIns="0">
+            <a:spAutoFit/>
+          </a:bodyPr>
+          <a:lstStyle/>
+          <a:p>
+            <a:pPr algn="l">
+              <a:lnSpc>
+                <a:spcPct val="120000"/>
+              </a:lnSpc>
+              <a:spcAft>
+                <a:spcPts val="600"/>
+              </a:spcAft>
+            </a:pPr>
+            <a:r>
+              <a:rPr sz="1250" b="0" i="0">
+                <a:solidFill>
+                  <a:srgbClr val="1C1C1C"/>
+                </a:solidFill>
+                <a:latin typeface="Segoe UI"/>
+              </a:rPr>
+              <a:t>Automated Shewhart 3σ alerts prevent unmonitored chiller runaways, eliminating ~INR 2.84 Lakhs in avoidable weekend waste.</a:t>
             </a:r>
           </a:p>
         </p:txBody>
@@ -10651,7 +11809,805 @@
         </p:nvSpPr>
         <p:spPr>
           <a:xfrm>
-            <a:off x="822960" y="2926080"/>
+            <a:off x="6199632" y="1371600"/>
+            <a:ext cx="5477256" cy="2240280"/>
+          </a:xfrm>
+          <a:prstGeom prst="rect">
+            <a:avLst/>
+          </a:prstGeom>
+          <a:solidFill>
+            <a:srgbClr val="F3F7FF"/>
+          </a:solidFill>
+          <a:ln w="12700">
+            <a:solidFill>
+              <a:srgbClr val="C8D4EE"/>
+            </a:solidFill>
+          </a:ln>
+          <a:effectLst/>
+        </p:spPr>
+        <p:style>
+          <a:lnRef idx="1">
+            <a:schemeClr val="accent1"/>
+          </a:lnRef>
+          <a:fillRef idx="3">
+            <a:schemeClr val="accent1"/>
+          </a:fillRef>
+          <a:effectRef idx="2">
+            <a:schemeClr val="accent1"/>
+          </a:effectRef>
+          <a:fontRef idx="minor">
+            <a:schemeClr val="lt1"/>
+          </a:fontRef>
+        </p:style>
+        <p:txBody>
+          <a:bodyPr rtlCol="0" anchor="ctr"/>
+          <a:lstStyle/>
+          <a:p>
+            <a:pPr algn="ctr"/>
+          </a:p>
+        </p:txBody>
+      </p:sp>
+      <p:sp>
+        <p:nvSpPr>
+          <p:cNvPr id="16" name="Rectangle 15"/>
+          <p:cNvSpPr/>
+          <p:nvPr/>
+        </p:nvSpPr>
+        <p:spPr>
+          <a:xfrm>
+            <a:off x="6199632" y="1371600"/>
+            <a:ext cx="5477256" cy="64008"/>
+          </a:xfrm>
+          <a:prstGeom prst="rect">
+            <a:avLst/>
+          </a:prstGeom>
+          <a:solidFill>
+            <a:srgbClr val="1E7A4F"/>
+          </a:solidFill>
+          <a:ln>
+            <a:noFill/>
+          </a:ln>
+          <a:effectLst/>
+        </p:spPr>
+        <p:style>
+          <a:lnRef idx="1">
+            <a:schemeClr val="accent1"/>
+          </a:lnRef>
+          <a:fillRef idx="3">
+            <a:schemeClr val="accent1"/>
+          </a:fillRef>
+          <a:effectRef idx="2">
+            <a:schemeClr val="accent1"/>
+          </a:effectRef>
+          <a:fontRef idx="minor">
+            <a:schemeClr val="lt1"/>
+          </a:fontRef>
+        </p:style>
+        <p:txBody>
+          <a:bodyPr rtlCol="0" anchor="ctr"/>
+          <a:lstStyle/>
+          <a:p>
+            <a:pPr algn="ctr"/>
+          </a:p>
+        </p:txBody>
+      </p:sp>
+      <p:sp>
+        <p:nvSpPr>
+          <p:cNvPr id="17" name="TextBox 16"/>
+          <p:cNvSpPr txBox="1"/>
+          <p:nvPr/>
+        </p:nvSpPr>
+        <p:spPr>
+          <a:xfrm>
+            <a:off x="6473952" y="1572768"/>
+            <a:ext cx="4937760" cy="320040"/>
+          </a:xfrm>
+          <a:prstGeom prst="rect">
+            <a:avLst/>
+          </a:prstGeom>
+          <a:noFill/>
+        </p:spPr>
+        <p:txBody>
+          <a:bodyPr wrap="square" lIns="0" rIns="0" tIns="0" bIns="0">
+            <a:spAutoFit/>
+          </a:bodyPr>
+          <a:lstStyle/>
+          <a:p>
+            <a:pPr algn="l">
+              <a:lnSpc>
+                <a:spcPct val="115000"/>
+              </a:lnSpc>
+              <a:spcAft>
+                <a:spcPts val="600"/>
+              </a:spcAft>
+            </a:pPr>
+            <a:r>
+              <a:rPr sz="1500" b="1" i="0">
+                <a:solidFill>
+                  <a:srgbClr val="10245C"/>
+                </a:solidFill>
+                <a:latin typeface="Segoe UI"/>
+              </a:rPr>
+              <a:t>Targeted Solar Expansion</a:t>
+            </a:r>
+          </a:p>
+        </p:txBody>
+      </p:sp>
+      <p:sp>
+        <p:nvSpPr>
+          <p:cNvPr id="18" name="TextBox 17"/>
+          <p:cNvSpPr txBox="1"/>
+          <p:nvPr/>
+        </p:nvSpPr>
+        <p:spPr>
+          <a:xfrm>
+            <a:off x="6473952" y="2011680"/>
+            <a:ext cx="4937760" cy="1463040"/>
+          </a:xfrm>
+          <a:prstGeom prst="rect">
+            <a:avLst/>
+          </a:prstGeom>
+          <a:noFill/>
+        </p:spPr>
+        <p:txBody>
+          <a:bodyPr wrap="square" lIns="0" rIns="0" tIns="0" bIns="0">
+            <a:spAutoFit/>
+          </a:bodyPr>
+          <a:lstStyle/>
+          <a:p>
+            <a:pPr algn="l">
+              <a:lnSpc>
+                <a:spcPct val="120000"/>
+              </a:lnSpc>
+              <a:spcAft>
+                <a:spcPts val="600"/>
+              </a:spcAft>
+            </a:pPr>
+            <a:r>
+              <a:rPr sz="1250" b="0" i="0">
+                <a:solidFill>
+                  <a:srgbClr val="1C1C1C"/>
+                </a:solidFill>
+                <a:latin typeface="Segoe UI"/>
+              </a:rPr>
+              <a:t>Analysis pinpoints Computing Wing C (4.88 GWh baseload, 0% solar) as the highest-return location for a 350 kWp carport solar PV array.</a:t>
+            </a:r>
+          </a:p>
+        </p:txBody>
+      </p:sp>
+      <p:sp>
+        <p:nvSpPr>
+          <p:cNvPr id="19" name="Rectangle 18"/>
+          <p:cNvSpPr/>
+          <p:nvPr/>
+        </p:nvSpPr>
+        <p:spPr>
+          <a:xfrm>
+            <a:off x="6199632" y="3794760"/>
+            <a:ext cx="5477256" cy="2240280"/>
+          </a:xfrm>
+          <a:prstGeom prst="rect">
+            <a:avLst/>
+          </a:prstGeom>
+          <a:solidFill>
+            <a:srgbClr val="F3F7FF"/>
+          </a:solidFill>
+          <a:ln w="12700">
+            <a:solidFill>
+              <a:srgbClr val="C8D4EE"/>
+            </a:solidFill>
+          </a:ln>
+          <a:effectLst/>
+        </p:spPr>
+        <p:style>
+          <a:lnRef idx="1">
+            <a:schemeClr val="accent1"/>
+          </a:lnRef>
+          <a:fillRef idx="3">
+            <a:schemeClr val="accent1"/>
+          </a:fillRef>
+          <a:effectRef idx="2">
+            <a:schemeClr val="accent1"/>
+          </a:effectRef>
+          <a:fontRef idx="minor">
+            <a:schemeClr val="lt1"/>
+          </a:fontRef>
+        </p:style>
+        <p:txBody>
+          <a:bodyPr rtlCol="0" anchor="ctr"/>
+          <a:lstStyle/>
+          <a:p>
+            <a:pPr algn="ctr"/>
+          </a:p>
+        </p:txBody>
+      </p:sp>
+      <p:sp>
+        <p:nvSpPr>
+          <p:cNvPr id="20" name="Rectangle 19"/>
+          <p:cNvSpPr/>
+          <p:nvPr/>
+        </p:nvSpPr>
+        <p:spPr>
+          <a:xfrm>
+            <a:off x="6199632" y="3794760"/>
+            <a:ext cx="5477256" cy="64008"/>
+          </a:xfrm>
+          <a:prstGeom prst="rect">
+            <a:avLst/>
+          </a:prstGeom>
+          <a:solidFill>
+            <a:srgbClr val="3366CC"/>
+          </a:solidFill>
+          <a:ln>
+            <a:noFill/>
+          </a:ln>
+          <a:effectLst/>
+        </p:spPr>
+        <p:style>
+          <a:lnRef idx="1">
+            <a:schemeClr val="accent1"/>
+          </a:lnRef>
+          <a:fillRef idx="3">
+            <a:schemeClr val="accent1"/>
+          </a:fillRef>
+          <a:effectRef idx="2">
+            <a:schemeClr val="accent1"/>
+          </a:effectRef>
+          <a:fontRef idx="minor">
+            <a:schemeClr val="lt1"/>
+          </a:fontRef>
+        </p:style>
+        <p:txBody>
+          <a:bodyPr rtlCol="0" anchor="ctr"/>
+          <a:lstStyle/>
+          <a:p>
+            <a:pPr algn="ctr"/>
+          </a:p>
+        </p:txBody>
+      </p:sp>
+      <p:sp>
+        <p:nvSpPr>
+          <p:cNvPr id="21" name="TextBox 20"/>
+          <p:cNvSpPr txBox="1"/>
+          <p:nvPr/>
+        </p:nvSpPr>
+        <p:spPr>
+          <a:xfrm>
+            <a:off x="6473952" y="3995928"/>
+            <a:ext cx="4937760" cy="320040"/>
+          </a:xfrm>
+          <a:prstGeom prst="rect">
+            <a:avLst/>
+          </a:prstGeom>
+          <a:noFill/>
+        </p:spPr>
+        <p:txBody>
+          <a:bodyPr wrap="square" lIns="0" rIns="0" tIns="0" bIns="0">
+            <a:spAutoFit/>
+          </a:bodyPr>
+          <a:lstStyle/>
+          <a:p>
+            <a:pPr algn="l">
+              <a:lnSpc>
+                <a:spcPct val="115000"/>
+              </a:lnSpc>
+              <a:spcAft>
+                <a:spcPts val="600"/>
+              </a:spcAft>
+            </a:pPr>
+            <a:r>
+              <a:rPr sz="1500" b="1" i="0">
+                <a:solidFill>
+                  <a:srgbClr val="10245C"/>
+                </a:solidFill>
+                <a:latin typeface="Segoe UI"/>
+              </a:rPr>
+              <a:t>Power Factor Correction</a:t>
+            </a:r>
+          </a:p>
+        </p:txBody>
+      </p:sp>
+      <p:sp>
+        <p:nvSpPr>
+          <p:cNvPr id="22" name="TextBox 21"/>
+          <p:cNvSpPr txBox="1"/>
+          <p:nvPr/>
+        </p:nvSpPr>
+        <p:spPr>
+          <a:xfrm>
+            <a:off x="6473952" y="4434840"/>
+            <a:ext cx="4937760" cy="1463040"/>
+          </a:xfrm>
+          <a:prstGeom prst="rect">
+            <a:avLst/>
+          </a:prstGeom>
+          <a:noFill/>
+        </p:spPr>
+        <p:txBody>
+          <a:bodyPr wrap="square" lIns="0" rIns="0" tIns="0" bIns="0">
+            <a:spAutoFit/>
+          </a:bodyPr>
+          <a:lstStyle/>
+          <a:p>
+            <a:pPr algn="l">
+              <a:lnSpc>
+                <a:spcPct val="120000"/>
+              </a:lnSpc>
+              <a:spcAft>
+                <a:spcPts val="600"/>
+              </a:spcAft>
+            </a:pPr>
+            <a:r>
+              <a:rPr sz="1250" b="0" i="0">
+                <a:solidFill>
+                  <a:srgbClr val="1C1C1C"/>
+                </a:solidFill>
+                <a:latin typeface="Segoe UI"/>
+              </a:rPr>
+              <a:t>Continuous monitoring of reactive power (kVARh) maintains power factor above 0.95, avoiding utility penalty surcharges.</a:t>
+            </a:r>
+          </a:p>
+        </p:txBody>
+      </p:sp>
+      <p:sp>
+        <p:nvSpPr>
+          <p:cNvPr id="23" name="TextBox 22"/>
+          <p:cNvSpPr txBox="1"/>
+          <p:nvPr/>
+        </p:nvSpPr>
+        <p:spPr>
+          <a:xfrm>
+            <a:off x="502920" y="6437376"/>
+            <a:ext cx="8686800" cy="256032"/>
+          </a:xfrm>
+          <a:prstGeom prst="rect">
+            <a:avLst/>
+          </a:prstGeom>
+          <a:noFill/>
+        </p:spPr>
+        <p:txBody>
+          <a:bodyPr wrap="square" lIns="0" rIns="0" tIns="0" bIns="0">
+            <a:spAutoFit/>
+          </a:bodyPr>
+          <a:lstStyle/>
+          <a:p>
+            <a:pPr algn="l">
+              <a:lnSpc>
+                <a:spcPct val="115000"/>
+              </a:lnSpc>
+              <a:spcAft>
+                <a:spcPts val="600"/>
+              </a:spcAft>
+            </a:pPr>
+            <a:r>
+              <a:rPr sz="900" b="0" i="0">
+                <a:solidFill>
+                  <a:srgbClr val="555555"/>
+                </a:solidFill>
+                <a:latin typeface="Segoe UI"/>
+              </a:rPr>
+              <a:t>MACSE603 - Visual Analytics Lab  |  Smart Energy Consumption Visualization Dashboard Using Power BI &amp; IoT Pipelines</a:t>
+            </a:r>
+          </a:p>
+        </p:txBody>
+      </p:sp>
+      <p:sp>
+        <p:nvSpPr>
+          <p:cNvPr id="24" name="TextBox 23"/>
+          <p:cNvSpPr txBox="1"/>
+          <p:nvPr/>
+        </p:nvSpPr>
+        <p:spPr>
+          <a:xfrm>
+            <a:off x="11064240" y="6437376"/>
+            <a:ext cx="640080" cy="256032"/>
+          </a:xfrm>
+          <a:prstGeom prst="rect">
+            <a:avLst/>
+          </a:prstGeom>
+          <a:noFill/>
+        </p:spPr>
+        <p:txBody>
+          <a:bodyPr wrap="square" lIns="0" rIns="0" tIns="0" bIns="0">
+            <a:spAutoFit/>
+          </a:bodyPr>
+          <a:lstStyle/>
+          <a:p>
+            <a:pPr algn="r">
+              <a:lnSpc>
+                <a:spcPct val="115000"/>
+              </a:lnSpc>
+              <a:spcAft>
+                <a:spcPts val="600"/>
+              </a:spcAft>
+            </a:pPr>
+            <a:r>
+              <a:rPr sz="900" b="1" i="0">
+                <a:solidFill>
+                  <a:srgbClr val="3366CC"/>
+                </a:solidFill>
+                <a:latin typeface="Segoe UI"/>
+              </a:rPr>
+              <a:t>16</a:t>
+            </a:r>
+          </a:p>
+        </p:txBody>
+      </p:sp>
+    </p:spTree>
+  </p:cSld>
+  <p:clrMapOvr>
+    <a:masterClrMapping/>
+  </p:clrMapOvr>
+</p:sld>
+</file>
+
+<file path=ppt/slides/slide18.xml><?xml version="1.0" encoding="utf-8"?>
+<p:sld xmlns:a="http://schemas.openxmlformats.org/drawingml/2006/main" xmlns:p="http://schemas.openxmlformats.org/presentationml/2006/main" xmlns:r="http://schemas.openxmlformats.org/officeDocument/2006/relationships">
+  <p:cSld>
+    <p:spTree>
+      <p:nvGrpSpPr>
+        <p:cNvPr id="1" name=""/>
+        <p:cNvGrpSpPr/>
+        <p:nvPr/>
+      </p:nvGrpSpPr>
+      <p:grpSpPr/>
+      <p:sp>
+        <p:nvSpPr>
+          <p:cNvPr id="2" name="Rectangle 1"/>
+          <p:cNvSpPr/>
+          <p:nvPr/>
+        </p:nvSpPr>
+        <p:spPr>
+          <a:xfrm>
+            <a:off x="0" y="0"/>
+            <a:ext cx="12191695" cy="128016"/>
+          </a:xfrm>
+          <a:prstGeom prst="rect">
+            <a:avLst/>
+          </a:prstGeom>
+          <a:solidFill>
+            <a:srgbClr val="10245C"/>
+          </a:solidFill>
+          <a:ln>
+            <a:noFill/>
+          </a:ln>
+          <a:effectLst/>
+        </p:spPr>
+        <p:style>
+          <a:lnRef idx="1">
+            <a:schemeClr val="accent1"/>
+          </a:lnRef>
+          <a:fillRef idx="3">
+            <a:schemeClr val="accent1"/>
+          </a:fillRef>
+          <a:effectRef idx="2">
+            <a:schemeClr val="accent1"/>
+          </a:effectRef>
+          <a:fontRef idx="minor">
+            <a:schemeClr val="lt1"/>
+          </a:fontRef>
+        </p:style>
+        <p:txBody>
+          <a:bodyPr rtlCol="0" anchor="ctr"/>
+          <a:lstStyle/>
+          <a:p>
+            <a:pPr algn="ctr"/>
+          </a:p>
+        </p:txBody>
+      </p:sp>
+      <p:sp>
+        <p:nvSpPr>
+          <p:cNvPr id="3" name="Rectangle 2"/>
+          <p:cNvSpPr/>
+          <p:nvPr/>
+        </p:nvSpPr>
+        <p:spPr>
+          <a:xfrm>
+            <a:off x="502920" y="329184"/>
+            <a:ext cx="566928" cy="566928"/>
+          </a:xfrm>
+          <a:prstGeom prst="rect">
+            <a:avLst/>
+          </a:prstGeom>
+          <a:solidFill>
+            <a:srgbClr val="3366CC"/>
+          </a:solidFill>
+          <a:ln>
+            <a:noFill/>
+          </a:ln>
+          <a:effectLst/>
+        </p:spPr>
+        <p:style>
+          <a:lnRef idx="1">
+            <a:schemeClr val="accent1"/>
+          </a:lnRef>
+          <a:fillRef idx="3">
+            <a:schemeClr val="accent1"/>
+          </a:fillRef>
+          <a:effectRef idx="2">
+            <a:schemeClr val="accent1"/>
+          </a:effectRef>
+          <a:fontRef idx="minor">
+            <a:schemeClr val="lt1"/>
+          </a:fontRef>
+        </p:style>
+        <p:txBody>
+          <a:bodyPr rtlCol="0" anchor="ctr"/>
+          <a:lstStyle/>
+          <a:p>
+            <a:pPr algn="ctr"/>
+          </a:p>
+        </p:txBody>
+      </p:sp>
+      <p:sp>
+        <p:nvSpPr>
+          <p:cNvPr id="4" name="TextBox 3"/>
+          <p:cNvSpPr txBox="1"/>
+          <p:nvPr/>
+        </p:nvSpPr>
+        <p:spPr>
+          <a:xfrm>
+            <a:off x="502920" y="429768"/>
+            <a:ext cx="566928" cy="365760"/>
+          </a:xfrm>
+          <a:prstGeom prst="rect">
+            <a:avLst/>
+          </a:prstGeom>
+          <a:noFill/>
+        </p:spPr>
+        <p:txBody>
+          <a:bodyPr wrap="square" lIns="0" rIns="0" tIns="0" bIns="0">
+            <a:spAutoFit/>
+          </a:bodyPr>
+          <a:lstStyle/>
+          <a:p>
+            <a:pPr algn="ctr">
+              <a:lnSpc>
+                <a:spcPct val="115000"/>
+              </a:lnSpc>
+              <a:spcAft>
+                <a:spcPts val="600"/>
+              </a:spcAft>
+            </a:pPr>
+            <a:r>
+              <a:rPr sz="1900" b="1" i="0">
+                <a:solidFill>
+                  <a:srgbClr val="FFFFFF"/>
+                </a:solidFill>
+                <a:latin typeface="Segoe UI"/>
+              </a:rPr>
+              <a:t>18</a:t>
+            </a:r>
+          </a:p>
+        </p:txBody>
+      </p:sp>
+      <p:sp>
+        <p:nvSpPr>
+          <p:cNvPr id="5" name="TextBox 4"/>
+          <p:cNvSpPr txBox="1"/>
+          <p:nvPr/>
+        </p:nvSpPr>
+        <p:spPr>
+          <a:xfrm>
+            <a:off x="1234440" y="384048"/>
+            <a:ext cx="10424160" cy="548640"/>
+          </a:xfrm>
+          <a:prstGeom prst="rect">
+            <a:avLst/>
+          </a:prstGeom>
+          <a:noFill/>
+        </p:spPr>
+        <p:txBody>
+          <a:bodyPr wrap="square" lIns="0" rIns="0" tIns="0" bIns="0">
+            <a:spAutoFit/>
+          </a:bodyPr>
+          <a:lstStyle/>
+          <a:p>
+            <a:pPr algn="l">
+              <a:lnSpc>
+                <a:spcPct val="115000"/>
+              </a:lnSpc>
+              <a:spcAft>
+                <a:spcPts val="600"/>
+              </a:spcAft>
+            </a:pPr>
+            <a:r>
+              <a:rPr sz="2500" b="1" i="0">
+                <a:solidFill>
+                  <a:srgbClr val="10245C"/>
+                </a:solidFill>
+                <a:latin typeface="Segoe UI"/>
+              </a:rPr>
+              <a:t>Project Summary &amp; Quantitative Achievements</a:t>
+            </a:r>
+          </a:p>
+        </p:txBody>
+      </p:sp>
+      <p:sp>
+        <p:nvSpPr>
+          <p:cNvPr id="6" name="Rectangle 5"/>
+          <p:cNvSpPr/>
+          <p:nvPr/>
+        </p:nvSpPr>
+        <p:spPr>
+          <a:xfrm>
+            <a:off x="1234440" y="1014984"/>
+            <a:ext cx="1051560" cy="45720"/>
+          </a:xfrm>
+          <a:prstGeom prst="rect">
+            <a:avLst/>
+          </a:prstGeom>
+          <a:solidFill>
+            <a:srgbClr val="3366CC"/>
+          </a:solidFill>
+          <a:ln>
+            <a:noFill/>
+          </a:ln>
+          <a:effectLst/>
+        </p:spPr>
+        <p:style>
+          <a:lnRef idx="1">
+            <a:schemeClr val="accent1"/>
+          </a:lnRef>
+          <a:fillRef idx="3">
+            <a:schemeClr val="accent1"/>
+          </a:fillRef>
+          <a:effectRef idx="2">
+            <a:schemeClr val="accent1"/>
+          </a:effectRef>
+          <a:fontRef idx="minor">
+            <a:schemeClr val="lt1"/>
+          </a:fontRef>
+        </p:style>
+        <p:txBody>
+          <a:bodyPr rtlCol="0" anchor="ctr"/>
+          <a:lstStyle/>
+          <a:p>
+            <a:pPr algn="ctr"/>
+          </a:p>
+        </p:txBody>
+      </p:sp>
+      <p:sp>
+        <p:nvSpPr>
+          <p:cNvPr id="7" name="Rectangle 6"/>
+          <p:cNvSpPr/>
+          <p:nvPr/>
+        </p:nvSpPr>
+        <p:spPr>
+          <a:xfrm>
+            <a:off x="502920" y="1261872"/>
+            <a:ext cx="11173968" cy="4892040"/>
+          </a:xfrm>
+          <a:prstGeom prst="rect">
+            <a:avLst/>
+          </a:prstGeom>
+          <a:solidFill>
+            <a:srgbClr val="F3F7FF"/>
+          </a:solidFill>
+          <a:ln w="12700">
+            <a:solidFill>
+              <a:srgbClr val="C8D4EE"/>
+            </a:solidFill>
+          </a:ln>
+          <a:effectLst/>
+        </p:spPr>
+        <p:style>
+          <a:lnRef idx="1">
+            <a:schemeClr val="accent1"/>
+          </a:lnRef>
+          <a:fillRef idx="3">
+            <a:schemeClr val="accent1"/>
+          </a:fillRef>
+          <a:effectRef idx="2">
+            <a:schemeClr val="accent1"/>
+          </a:effectRef>
+          <a:fontRef idx="minor">
+            <a:schemeClr val="lt1"/>
+          </a:fontRef>
+        </p:style>
+        <p:txBody>
+          <a:bodyPr rtlCol="0" anchor="ctr"/>
+          <a:lstStyle/>
+          <a:p>
+            <a:pPr algn="ctr"/>
+          </a:p>
+        </p:txBody>
+      </p:sp>
+      <p:sp>
+        <p:nvSpPr>
+          <p:cNvPr id="8" name="Rectangle 7"/>
+          <p:cNvSpPr/>
+          <p:nvPr/>
+        </p:nvSpPr>
+        <p:spPr>
+          <a:xfrm>
+            <a:off x="502920" y="1261872"/>
+            <a:ext cx="11173968" cy="64008"/>
+          </a:xfrm>
+          <a:prstGeom prst="rect">
+            <a:avLst/>
+          </a:prstGeom>
+          <a:solidFill>
+            <a:srgbClr val="10245C"/>
+          </a:solidFill>
+          <a:ln>
+            <a:noFill/>
+          </a:ln>
+          <a:effectLst/>
+        </p:spPr>
+        <p:style>
+          <a:lnRef idx="1">
+            <a:schemeClr val="accent1"/>
+          </a:lnRef>
+          <a:fillRef idx="3">
+            <a:schemeClr val="accent1"/>
+          </a:fillRef>
+          <a:effectRef idx="2">
+            <a:schemeClr val="accent1"/>
+          </a:effectRef>
+          <a:fontRef idx="minor">
+            <a:schemeClr val="lt1"/>
+          </a:fontRef>
+        </p:style>
+        <p:txBody>
+          <a:bodyPr rtlCol="0" anchor="ctr"/>
+          <a:lstStyle/>
+          <a:p>
+            <a:pPr algn="ctr"/>
+          </a:p>
+        </p:txBody>
+      </p:sp>
+      <p:sp>
+        <p:nvSpPr>
+          <p:cNvPr id="9" name="TextBox 8"/>
+          <p:cNvSpPr txBox="1"/>
+          <p:nvPr/>
+        </p:nvSpPr>
+        <p:spPr>
+          <a:xfrm>
+            <a:off x="822960" y="1536192"/>
+            <a:ext cx="10515600" cy="320040"/>
+          </a:xfrm>
+          <a:prstGeom prst="rect">
+            <a:avLst/>
+          </a:prstGeom>
+          <a:noFill/>
+        </p:spPr>
+        <p:txBody>
+          <a:bodyPr wrap="square" lIns="0" rIns="0" tIns="0" bIns="0">
+            <a:spAutoFit/>
+          </a:bodyPr>
+          <a:lstStyle/>
+          <a:p>
+            <a:pPr algn="l">
+              <a:lnSpc>
+                <a:spcPct val="115000"/>
+              </a:lnSpc>
+              <a:spcAft>
+                <a:spcPts val="600"/>
+              </a:spcAft>
+            </a:pPr>
+            <a:r>
+              <a:rPr sz="1300" b="1" i="0">
+                <a:solidFill>
+                  <a:srgbClr val="10245C"/>
+                </a:solidFill>
+                <a:latin typeface="Segoe UI"/>
+              </a:rPr>
+              <a:t>KEY QUANTITATIVE DELIVERABLES (FY 2025)</a:t>
+            </a:r>
+          </a:p>
+        </p:txBody>
+      </p:sp>
+      <p:sp>
+        <p:nvSpPr>
+          <p:cNvPr id="10" name="Rectangle 9"/>
+          <p:cNvSpPr/>
+          <p:nvPr/>
+        </p:nvSpPr>
+        <p:spPr>
+          <a:xfrm>
+            <a:off x="822960" y="1965960"/>
             <a:ext cx="5120640" cy="822960"/>
           </a:xfrm>
           <a:prstGeom prst="rect">
@@ -10691,13 +12647,13 @@
       </p:sp>
       <p:sp>
         <p:nvSpPr>
-          <p:cNvPr id="16" name="Rectangle 15"/>
+          <p:cNvPr id="11" name="Rectangle 10"/>
           <p:cNvSpPr/>
           <p:nvPr/>
         </p:nvSpPr>
         <p:spPr>
           <a:xfrm>
-            <a:off x="822960" y="2926080"/>
+            <a:off x="822960" y="1965960"/>
             <a:ext cx="73152" cy="822960"/>
           </a:xfrm>
           <a:prstGeom prst="rect">
@@ -10735,13 +12691,13 @@
       </p:sp>
       <p:sp>
         <p:nvSpPr>
-          <p:cNvPr id="17" name="TextBox 16"/>
+          <p:cNvPr id="12" name="TextBox 11"/>
           <p:cNvSpPr txBox="1"/>
           <p:nvPr/>
         </p:nvSpPr>
         <p:spPr>
           <a:xfrm>
-            <a:off x="1005840" y="3035808"/>
+            <a:off x="1005840" y="2075688"/>
             <a:ext cx="2194560" cy="320040"/>
           </a:xfrm>
           <a:prstGeom prst="rect">
@@ -10770,20 +12726,20 @@
                 </a:solidFill>
                 <a:latin typeface="Segoe UI"/>
               </a:rPr>
-              <a:t>Electricity Spend</a:t>
-            </a:r>
-          </a:p>
-        </p:txBody>
-      </p:sp>
-      <p:sp>
-        <p:nvSpPr>
-          <p:cNvPr id="18" name="TextBox 17"/>
+              <a:t>Total Active Energy</a:t>
+            </a:r>
+          </a:p>
+        </p:txBody>
+      </p:sp>
+      <p:sp>
+        <p:nvSpPr>
+          <p:cNvPr id="13" name="TextBox 12"/>
           <p:cNvSpPr txBox="1"/>
           <p:nvPr/>
         </p:nvSpPr>
         <p:spPr>
           <a:xfrm>
-            <a:off x="1005840" y="3310128"/>
+            <a:off x="1005840" y="2350008"/>
             <a:ext cx="2194560" cy="365760"/>
           </a:xfrm>
           <a:prstGeom prst="rect">
@@ -10812,20 +12768,20 @@
                 </a:solidFill>
                 <a:latin typeface="Segoe UI"/>
               </a:rPr>
-              <a:t>₹13.20 Cr</a:t>
-            </a:r>
-          </a:p>
-        </p:txBody>
-      </p:sp>
-      <p:sp>
-        <p:nvSpPr>
-          <p:cNvPr id="19" name="TextBox 18"/>
+              <a:t>19.35 GWh</a:t>
+            </a:r>
+          </a:p>
+        </p:txBody>
+      </p:sp>
+      <p:sp>
+        <p:nvSpPr>
+          <p:cNvPr id="14" name="TextBox 13"/>
           <p:cNvSpPr txBox="1"/>
           <p:nvPr/>
         </p:nvSpPr>
         <p:spPr>
           <a:xfrm>
-            <a:off x="3291840" y="3108960"/>
+            <a:off x="3291840" y="2148840"/>
             <a:ext cx="2514600" cy="548640"/>
           </a:xfrm>
           <a:prstGeom prst="rect">
@@ -10854,20 +12810,20 @@
                 </a:solidFill>
                 <a:latin typeface="Segoe UI"/>
               </a:rPr>
-              <a:t>Time-of-Use tariff structure with peak penalty accounting</a:t>
-            </a:r>
-          </a:p>
-        </p:txBody>
-      </p:sp>
-      <p:sp>
-        <p:nvSpPr>
-          <p:cNvPr id="20" name="Rectangle 19"/>
+              <a:t>52,560 hourly metered readings across 6 campus facilities</a:t>
+            </a:r>
+          </a:p>
+        </p:txBody>
+      </p:sp>
+      <p:sp>
+        <p:nvSpPr>
+          <p:cNvPr id="15" name="Rectangle 14"/>
           <p:cNvSpPr/>
           <p:nvPr/>
         </p:nvSpPr>
         <p:spPr>
           <a:xfrm>
-            <a:off x="822960" y="3886200"/>
+            <a:off x="822960" y="2926080"/>
             <a:ext cx="5120640" cy="822960"/>
           </a:xfrm>
           <a:prstGeom prst="rect">
@@ -10907,13 +12863,13 @@
       </p:sp>
       <p:sp>
         <p:nvSpPr>
-          <p:cNvPr id="21" name="Rectangle 20"/>
+          <p:cNvPr id="16" name="Rectangle 15"/>
           <p:cNvSpPr/>
           <p:nvPr/>
         </p:nvSpPr>
         <p:spPr>
           <a:xfrm>
-            <a:off x="822960" y="3886200"/>
+            <a:off x="822960" y="2926080"/>
             <a:ext cx="73152" cy="822960"/>
           </a:xfrm>
           <a:prstGeom prst="rect">
@@ -10951,13 +12907,13 @@
       </p:sp>
       <p:sp>
         <p:nvSpPr>
-          <p:cNvPr id="22" name="TextBox 21"/>
+          <p:cNvPr id="17" name="TextBox 16"/>
           <p:cNvSpPr txBox="1"/>
           <p:nvPr/>
         </p:nvSpPr>
         <p:spPr>
           <a:xfrm>
-            <a:off x="1005840" y="3995928"/>
+            <a:off x="1005840" y="3035808"/>
             <a:ext cx="2194560" cy="320040"/>
           </a:xfrm>
           <a:prstGeom prst="rect">
@@ -10986,20 +12942,20 @@
                 </a:solidFill>
                 <a:latin typeface="Segoe UI"/>
               </a:rPr>
-              <a:t>Solar Generation</a:t>
-            </a:r>
-          </a:p>
-        </p:txBody>
-      </p:sp>
-      <p:sp>
-        <p:nvSpPr>
-          <p:cNvPr id="23" name="TextBox 22"/>
+              <a:t>Electricity Spend</a:t>
+            </a:r>
+          </a:p>
+        </p:txBody>
+      </p:sp>
+      <p:sp>
+        <p:nvSpPr>
+          <p:cNvPr id="18" name="TextBox 17"/>
           <p:cNvSpPr txBox="1"/>
           <p:nvPr/>
         </p:nvSpPr>
         <p:spPr>
           <a:xfrm>
-            <a:off x="1005840" y="4270248"/>
+            <a:off x="1005840" y="3310128"/>
             <a:ext cx="2194560" cy="365760"/>
           </a:xfrm>
           <a:prstGeom prst="rect">
@@ -11028,20 +12984,20 @@
                 </a:solidFill>
                 <a:latin typeface="Segoe UI"/>
               </a:rPr>
-              <a:t>1.14 GWh</a:t>
-            </a:r>
-          </a:p>
-        </p:txBody>
-      </p:sp>
-      <p:sp>
-        <p:nvSpPr>
-          <p:cNvPr id="24" name="TextBox 23"/>
+              <a:t>₹13.20 Cr</a:t>
+            </a:r>
+          </a:p>
+        </p:txBody>
+      </p:sp>
+      <p:sp>
+        <p:nvSpPr>
+          <p:cNvPr id="19" name="TextBox 18"/>
           <p:cNvSpPr txBox="1"/>
           <p:nvPr/>
         </p:nvSpPr>
         <p:spPr>
           <a:xfrm>
-            <a:off x="3291840" y="4069080"/>
+            <a:off x="3291840" y="3108960"/>
             <a:ext cx="2514600" cy="548640"/>
           </a:xfrm>
           <a:prstGeom prst="rect">
@@ -11070,20 +13026,20 @@
                 </a:solidFill>
                 <a:latin typeface="Segoe UI"/>
               </a:rPr>
-              <a:t>5.90% Renewable penetration from 590 kWp installed PV</a:t>
-            </a:r>
-          </a:p>
-        </p:txBody>
-      </p:sp>
-      <p:sp>
-        <p:nvSpPr>
-          <p:cNvPr id="25" name="Rectangle 24"/>
+              <a:t>Time-of-Use tariff structure with peak penalty accounting</a:t>
+            </a:r>
+          </a:p>
+        </p:txBody>
+      </p:sp>
+      <p:sp>
+        <p:nvSpPr>
+          <p:cNvPr id="20" name="Rectangle 19"/>
           <p:cNvSpPr/>
           <p:nvPr/>
         </p:nvSpPr>
         <p:spPr>
           <a:xfrm>
-            <a:off x="822960" y="4846320"/>
+            <a:off x="822960" y="3886200"/>
             <a:ext cx="5120640" cy="822960"/>
           </a:xfrm>
           <a:prstGeom prst="rect">
@@ -11123,13 +13079,13 @@
       </p:sp>
       <p:sp>
         <p:nvSpPr>
-          <p:cNvPr id="26" name="Rectangle 25"/>
+          <p:cNvPr id="21" name="Rectangle 20"/>
           <p:cNvSpPr/>
           <p:nvPr/>
         </p:nvSpPr>
         <p:spPr>
           <a:xfrm>
-            <a:off x="822960" y="4846320"/>
+            <a:off x="822960" y="3886200"/>
             <a:ext cx="73152" cy="822960"/>
           </a:xfrm>
           <a:prstGeom prst="rect">
@@ -11167,13 +13123,13 @@
       </p:sp>
       <p:sp>
         <p:nvSpPr>
-          <p:cNvPr id="27" name="TextBox 26"/>
+          <p:cNvPr id="22" name="TextBox 21"/>
           <p:cNvSpPr txBox="1"/>
           <p:nvPr/>
         </p:nvSpPr>
         <p:spPr>
           <a:xfrm>
-            <a:off x="1005840" y="4956048"/>
+            <a:off x="1005840" y="3995928"/>
             <a:ext cx="2194560" cy="320040"/>
           </a:xfrm>
           <a:prstGeom prst="rect">
@@ -11202,20 +13158,20 @@
                 </a:solidFill>
                 <a:latin typeface="Segoe UI"/>
               </a:rPr>
-              <a:t>Campus Peak Demand</a:t>
-            </a:r>
-          </a:p>
-        </p:txBody>
-      </p:sp>
-      <p:sp>
-        <p:nvSpPr>
-          <p:cNvPr id="28" name="TextBox 27"/>
+              <a:t>Solar Generation</a:t>
+            </a:r>
+          </a:p>
+        </p:txBody>
+      </p:sp>
+      <p:sp>
+        <p:nvSpPr>
+          <p:cNvPr id="23" name="TextBox 22"/>
           <p:cNvSpPr txBox="1"/>
           <p:nvPr/>
         </p:nvSpPr>
         <p:spPr>
           <a:xfrm>
-            <a:off x="1005840" y="5230368"/>
+            <a:off x="1005840" y="4270248"/>
             <a:ext cx="2194560" cy="365760"/>
           </a:xfrm>
           <a:prstGeom prst="rect">
@@ -11244,20 +13200,20 @@
                 </a:solidFill>
                 <a:latin typeface="Segoe UI"/>
               </a:rPr>
-              <a:t>2,840 kW</a:t>
-            </a:r>
-          </a:p>
-        </p:txBody>
-      </p:sp>
-      <p:sp>
-        <p:nvSpPr>
-          <p:cNvPr id="29" name="TextBox 28"/>
+              <a:t>1.14 GWh</a:t>
+            </a:r>
+          </a:p>
+        </p:txBody>
+      </p:sp>
+      <p:sp>
+        <p:nvSpPr>
+          <p:cNvPr id="24" name="TextBox 23"/>
           <p:cNvSpPr txBox="1"/>
           <p:nvPr/>
         </p:nvSpPr>
         <p:spPr>
           <a:xfrm>
-            <a:off x="3291840" y="5029200"/>
+            <a:off x="3291840" y="4069080"/>
             <a:ext cx="2514600" cy="548640"/>
           </a:xfrm>
           <a:prstGeom prst="rect">
@@ -11286,20 +13242,20 @@
                 </a:solidFill>
                 <a:latin typeface="Segoe UI"/>
               </a:rPr>
-              <a:t>Coincident summer cooling peak recorded in June</a:t>
-            </a:r>
-          </a:p>
-        </p:txBody>
-      </p:sp>
-      <p:sp>
-        <p:nvSpPr>
-          <p:cNvPr id="30" name="Rectangle 29"/>
+              <a:t>5.90% Renewable penetration from 590 kWp installed PV</a:t>
+            </a:r>
+          </a:p>
+        </p:txBody>
+      </p:sp>
+      <p:sp>
+        <p:nvSpPr>
+          <p:cNvPr id="25" name="Rectangle 24"/>
           <p:cNvSpPr/>
           <p:nvPr/>
         </p:nvSpPr>
         <p:spPr>
           <a:xfrm>
-            <a:off x="6217920" y="1965960"/>
+            <a:off x="822960" y="4846320"/>
             <a:ext cx="5120640" cy="822960"/>
           </a:xfrm>
           <a:prstGeom prst="rect">
@@ -11339,13 +13295,13 @@
       </p:sp>
       <p:sp>
         <p:nvSpPr>
-          <p:cNvPr id="31" name="Rectangle 30"/>
+          <p:cNvPr id="26" name="Rectangle 25"/>
           <p:cNvSpPr/>
           <p:nvPr/>
         </p:nvSpPr>
         <p:spPr>
           <a:xfrm>
-            <a:off x="6217920" y="1965960"/>
+            <a:off x="822960" y="4846320"/>
             <a:ext cx="73152" cy="822960"/>
           </a:xfrm>
           <a:prstGeom prst="rect">
@@ -11383,13 +13339,13 @@
       </p:sp>
       <p:sp>
         <p:nvSpPr>
-          <p:cNvPr id="32" name="TextBox 31"/>
+          <p:cNvPr id="27" name="TextBox 26"/>
           <p:cNvSpPr txBox="1"/>
           <p:nvPr/>
         </p:nvSpPr>
         <p:spPr>
           <a:xfrm>
-            <a:off x="6400800" y="2075688"/>
+            <a:off x="1005840" y="4956048"/>
             <a:ext cx="2194560" cy="320040"/>
           </a:xfrm>
           <a:prstGeom prst="rect">
@@ -11418,20 +13374,20 @@
                 </a:solidFill>
                 <a:latin typeface="Segoe UI"/>
               </a:rPr>
-              <a:t>Carbon Offset</a:t>
-            </a:r>
-          </a:p>
-        </p:txBody>
-      </p:sp>
-      <p:sp>
-        <p:nvSpPr>
-          <p:cNvPr id="33" name="TextBox 32"/>
+              <a:t>Campus Peak Demand</a:t>
+            </a:r>
+          </a:p>
+        </p:txBody>
+      </p:sp>
+      <p:sp>
+        <p:nvSpPr>
+          <p:cNvPr id="28" name="TextBox 27"/>
           <p:cNvSpPr txBox="1"/>
           <p:nvPr/>
         </p:nvSpPr>
         <p:spPr>
           <a:xfrm>
-            <a:off x="6400800" y="2350008"/>
+            <a:off x="1005840" y="5230368"/>
             <a:ext cx="2194560" cy="365760"/>
           </a:xfrm>
           <a:prstGeom prst="rect">
@@ -11460,20 +13416,20 @@
                 </a:solidFill>
                 <a:latin typeface="Segoe UI"/>
               </a:rPr>
-              <a:t>936.8 tCO2e</a:t>
-            </a:r>
-          </a:p>
-        </p:txBody>
-      </p:sp>
-      <p:sp>
-        <p:nvSpPr>
-          <p:cNvPr id="34" name="TextBox 33"/>
+              <a:t>2,840 kW</a:t>
+            </a:r>
+          </a:p>
+        </p:txBody>
+      </p:sp>
+      <p:sp>
+        <p:nvSpPr>
+          <p:cNvPr id="29" name="TextBox 28"/>
           <p:cNvSpPr txBox="1"/>
           <p:nvPr/>
         </p:nvSpPr>
         <p:spPr>
           <a:xfrm>
-            <a:off x="8686800" y="2148840"/>
+            <a:off x="3291840" y="5029200"/>
             <a:ext cx="2514600" cy="548640"/>
           </a:xfrm>
           <a:prstGeom prst="rect">
@@ -11502,20 +13458,20 @@
                 </a:solidFill>
                 <a:latin typeface="Segoe UI"/>
               </a:rPr>
-              <a:t>Direct clean generation abatement (0.82 kg/kWh CEA factor)</a:t>
-            </a:r>
-          </a:p>
-        </p:txBody>
-      </p:sp>
-      <p:sp>
-        <p:nvSpPr>
-          <p:cNvPr id="35" name="Rectangle 34"/>
+              <a:t>Coincident summer cooling peak recorded in June</a:t>
+            </a:r>
+          </a:p>
+        </p:txBody>
+      </p:sp>
+      <p:sp>
+        <p:nvSpPr>
+          <p:cNvPr id="30" name="Rectangle 29"/>
           <p:cNvSpPr/>
           <p:nvPr/>
         </p:nvSpPr>
         <p:spPr>
           <a:xfrm>
-            <a:off x="6217920" y="2926080"/>
+            <a:off x="6217920" y="1965960"/>
             <a:ext cx="5120640" cy="822960"/>
           </a:xfrm>
           <a:prstGeom prst="rect">
@@ -11555,13 +13511,13 @@
       </p:sp>
       <p:sp>
         <p:nvSpPr>
-          <p:cNvPr id="36" name="Rectangle 35"/>
+          <p:cNvPr id="31" name="Rectangle 30"/>
           <p:cNvSpPr/>
           <p:nvPr/>
         </p:nvSpPr>
         <p:spPr>
           <a:xfrm>
-            <a:off x="6217920" y="2926080"/>
+            <a:off x="6217920" y="1965960"/>
             <a:ext cx="73152" cy="822960"/>
           </a:xfrm>
           <a:prstGeom prst="rect">
@@ -11599,13 +13555,13 @@
       </p:sp>
       <p:sp>
         <p:nvSpPr>
-          <p:cNvPr id="37" name="TextBox 36"/>
+          <p:cNvPr id="32" name="TextBox 31"/>
           <p:cNvSpPr txBox="1"/>
           <p:nvPr/>
         </p:nvSpPr>
         <p:spPr>
           <a:xfrm>
-            <a:off x="6400800" y="3035808"/>
+            <a:off x="6400800" y="2075688"/>
             <a:ext cx="2194560" cy="320040"/>
           </a:xfrm>
           <a:prstGeom prst="rect">
@@ -11634,20 +13590,20 @@
                 </a:solidFill>
                 <a:latin typeface="Segoe UI"/>
               </a:rPr>
-              <a:t>Forecasting Accuracy</a:t>
-            </a:r>
-          </a:p>
-        </p:txBody>
-      </p:sp>
-      <p:sp>
-        <p:nvSpPr>
-          <p:cNvPr id="38" name="TextBox 37"/>
+              <a:t>Carbon Offset</a:t>
+            </a:r>
+          </a:p>
+        </p:txBody>
+      </p:sp>
+      <p:sp>
+        <p:nvSpPr>
+          <p:cNvPr id="33" name="TextBox 32"/>
           <p:cNvSpPr txBox="1"/>
           <p:nvPr/>
         </p:nvSpPr>
         <p:spPr>
           <a:xfrm>
-            <a:off x="6400800" y="3310128"/>
+            <a:off x="6400800" y="2350008"/>
             <a:ext cx="2194560" cy="365760"/>
           </a:xfrm>
           <a:prstGeom prst="rect">
@@ -11676,20 +13632,20 @@
                 </a:solidFill>
                 <a:latin typeface="Segoe UI"/>
               </a:rPr>
-              <a:t>R² = 0.996</a:t>
-            </a:r>
-          </a:p>
-        </p:txBody>
-      </p:sp>
-      <p:sp>
-        <p:nvSpPr>
-          <p:cNvPr id="39" name="TextBox 38"/>
+              <a:t>936.8 tCO2e</a:t>
+            </a:r>
+          </a:p>
+        </p:txBody>
+      </p:sp>
+      <p:sp>
+        <p:nvSpPr>
+          <p:cNvPr id="34" name="TextBox 33"/>
           <p:cNvSpPr txBox="1"/>
           <p:nvPr/>
         </p:nvSpPr>
         <p:spPr>
           <a:xfrm>
-            <a:off x="8686800" y="3108960"/>
+            <a:off x="8686800" y="2148840"/>
             <a:ext cx="2514600" cy="548640"/>
           </a:xfrm>
           <a:prstGeom prst="rect">
@@ -11718,20 +13674,20 @@
                 </a:solidFill>
                 <a:latin typeface="Segoe UI"/>
               </a:rPr>
-              <a:t>MAPE = 0.61%, MAE = 270.1 kWh on 30-day holdout validation</a:t>
-            </a:r>
-          </a:p>
-        </p:txBody>
-      </p:sp>
-      <p:sp>
-        <p:nvSpPr>
-          <p:cNvPr id="40" name="Rectangle 39"/>
+              <a:t>Direct clean generation abatement (0.82 kg/kWh CEA factor)</a:t>
+            </a:r>
+          </a:p>
+        </p:txBody>
+      </p:sp>
+      <p:sp>
+        <p:nvSpPr>
+          <p:cNvPr id="35" name="Rectangle 34"/>
           <p:cNvSpPr/>
           <p:nvPr/>
         </p:nvSpPr>
         <p:spPr>
           <a:xfrm>
-            <a:off x="6217920" y="3886200"/>
+            <a:off x="6217920" y="2926080"/>
             <a:ext cx="5120640" cy="822960"/>
           </a:xfrm>
           <a:prstGeom prst="rect">
@@ -11771,13 +13727,13 @@
       </p:sp>
       <p:sp>
         <p:nvSpPr>
-          <p:cNvPr id="41" name="Rectangle 40"/>
+          <p:cNvPr id="36" name="Rectangle 35"/>
           <p:cNvSpPr/>
           <p:nvPr/>
         </p:nvSpPr>
         <p:spPr>
           <a:xfrm>
-            <a:off x="6217920" y="3886200"/>
+            <a:off x="6217920" y="2926080"/>
             <a:ext cx="73152" cy="822960"/>
           </a:xfrm>
           <a:prstGeom prst="rect">
@@ -11815,13 +13771,13 @@
       </p:sp>
       <p:sp>
         <p:nvSpPr>
-          <p:cNvPr id="42" name="TextBox 41"/>
+          <p:cNvPr id="37" name="TextBox 36"/>
           <p:cNvSpPr txBox="1"/>
           <p:nvPr/>
         </p:nvSpPr>
         <p:spPr>
           <a:xfrm>
-            <a:off x="6400800" y="3995928"/>
+            <a:off x="6400800" y="3035808"/>
             <a:ext cx="2194560" cy="320040"/>
           </a:xfrm>
           <a:prstGeom prst="rect">
@@ -11850,20 +13806,20 @@
                 </a:solidFill>
                 <a:latin typeface="Segoe UI"/>
               </a:rPr>
-              <a:t>Operational Breaches</a:t>
-            </a:r>
-          </a:p>
-        </p:txBody>
-      </p:sp>
-      <p:sp>
-        <p:nvSpPr>
-          <p:cNvPr id="43" name="TextBox 42"/>
+              <a:t>Forecasting Accuracy</a:t>
+            </a:r>
+          </a:p>
+        </p:txBody>
+      </p:sp>
+      <p:sp>
+        <p:nvSpPr>
+          <p:cNvPr id="38" name="TextBox 37"/>
           <p:cNvSpPr txBox="1"/>
           <p:nvPr/>
         </p:nvSpPr>
         <p:spPr>
           <a:xfrm>
-            <a:off x="6400800" y="4270248"/>
+            <a:off x="6400800" y="3310128"/>
             <a:ext cx="2194560" cy="365760"/>
           </a:xfrm>
           <a:prstGeom prst="rect">
@@ -11892,20 +13848,20 @@
                 </a:solidFill>
                 <a:latin typeface="Segoe UI"/>
               </a:rPr>
-              <a:t>196 Flagged</a:t>
-            </a:r>
-          </a:p>
-        </p:txBody>
-      </p:sp>
-      <p:sp>
-        <p:nvSpPr>
-          <p:cNvPr id="44" name="TextBox 43"/>
+              <a:t>R² = 0.996</a:t>
+            </a:r>
+          </a:p>
+        </p:txBody>
+      </p:sp>
+      <p:sp>
+        <p:nvSpPr>
+          <p:cNvPr id="39" name="TextBox 38"/>
           <p:cNvSpPr txBox="1"/>
           <p:nvPr/>
         </p:nvSpPr>
         <p:spPr>
           <a:xfrm>
-            <a:off x="8686800" y="4069080"/>
+            <a:off x="8686800" y="3108960"/>
             <a:ext cx="2514600" cy="548640"/>
           </a:xfrm>
           <a:prstGeom prst="rect">
@@ -11934,20 +13890,20 @@
                 </a:solidFill>
                 <a:latin typeface="Segoe UI"/>
               </a:rPr>
-              <a:t>Shewhart ±3σ control limits identifying equipment leaks</a:t>
-            </a:r>
-          </a:p>
-        </p:txBody>
-      </p:sp>
-      <p:sp>
-        <p:nvSpPr>
-          <p:cNvPr id="45" name="Rectangle 44"/>
+              <a:t>MAPE = 0.61%, MAE = 270.1 kWh on 30-day holdout validation</a:t>
+            </a:r>
+          </a:p>
+        </p:txBody>
+      </p:sp>
+      <p:sp>
+        <p:nvSpPr>
+          <p:cNvPr id="40" name="Rectangle 39"/>
           <p:cNvSpPr/>
           <p:nvPr/>
         </p:nvSpPr>
         <p:spPr>
           <a:xfrm>
-            <a:off x="6217920" y="4846320"/>
+            <a:off x="6217920" y="3886200"/>
             <a:ext cx="5120640" cy="822960"/>
           </a:xfrm>
           <a:prstGeom prst="rect">
@@ -11987,13 +13943,13 @@
       </p:sp>
       <p:sp>
         <p:nvSpPr>
-          <p:cNvPr id="46" name="Rectangle 45"/>
+          <p:cNvPr id="41" name="Rectangle 40"/>
           <p:cNvSpPr/>
           <p:nvPr/>
         </p:nvSpPr>
         <p:spPr>
           <a:xfrm>
-            <a:off x="6217920" y="4846320"/>
+            <a:off x="6217920" y="3886200"/>
             <a:ext cx="73152" cy="822960"/>
           </a:xfrm>
           <a:prstGeom prst="rect">
@@ -12031,13 +13987,13 @@
       </p:sp>
       <p:sp>
         <p:nvSpPr>
-          <p:cNvPr id="47" name="TextBox 46"/>
+          <p:cNvPr id="42" name="TextBox 41"/>
           <p:cNvSpPr txBox="1"/>
           <p:nvPr/>
         </p:nvSpPr>
         <p:spPr>
           <a:xfrm>
-            <a:off x="6400800" y="4956048"/>
+            <a:off x="6400800" y="3995928"/>
             <a:ext cx="2194560" cy="320040"/>
           </a:xfrm>
           <a:prstGeom prst="rect">
@@ -12066,20 +14022,20 @@
                 </a:solidFill>
                 <a:latin typeface="Segoe UI"/>
               </a:rPr>
-              <a:t>Interactive Serving</a:t>
-            </a:r>
-          </a:p>
-        </p:txBody>
-      </p:sp>
-      <p:sp>
-        <p:nvSpPr>
-          <p:cNvPr id="48" name="TextBox 47"/>
+              <a:t>Operational Breaches</a:t>
+            </a:r>
+          </a:p>
+        </p:txBody>
+      </p:sp>
+      <p:sp>
+        <p:nvSpPr>
+          <p:cNvPr id="43" name="TextBox 42"/>
           <p:cNvSpPr txBox="1"/>
           <p:nvPr/>
         </p:nvSpPr>
         <p:spPr>
           <a:xfrm>
-            <a:off x="6400800" y="5230368"/>
+            <a:off x="6400800" y="4270248"/>
             <a:ext cx="2194560" cy="365760"/>
           </a:xfrm>
           <a:prstGeom prst="rect">
@@ -12108,20 +14064,20 @@
                 </a:solidFill>
                 <a:latin typeface="Segoe UI"/>
               </a:rPr>
-              <a:t>Dual Delivery</a:t>
-            </a:r>
-          </a:p>
-        </p:txBody>
-      </p:sp>
-      <p:sp>
-        <p:nvSpPr>
-          <p:cNvPr id="49" name="TextBox 48"/>
+              <a:t>196 Flagged</a:t>
+            </a:r>
+          </a:p>
+        </p:txBody>
+      </p:sp>
+      <p:sp>
+        <p:nvSpPr>
+          <p:cNvPr id="44" name="TextBox 43"/>
           <p:cNvSpPr txBox="1"/>
           <p:nvPr/>
         </p:nvSpPr>
         <p:spPr>
           <a:xfrm>
-            <a:off x="8686800" y="5029200"/>
+            <a:off x="8686800" y="4069080"/>
             <a:ext cx="2514600" cy="548640"/>
           </a:xfrm>
           <a:prstGeom prst="rect">
@@ -12150,21 +14106,111 @@
                 </a:solidFill>
                 <a:latin typeface="Segoe UI"/>
               </a:rPr>
-              <a:t>Power BI Desktop (50+ DAX measures) &amp; Apache ECharts Web UI</a:t>
-            </a:r>
-          </a:p>
-        </p:txBody>
-      </p:sp>
-      <p:sp>
-        <p:nvSpPr>
-          <p:cNvPr id="50" name="TextBox 49"/>
+              <a:t>Shewhart ±3σ control limits identifying equipment leaks</a:t>
+            </a:r>
+          </a:p>
+        </p:txBody>
+      </p:sp>
+      <p:sp>
+        <p:nvSpPr>
+          <p:cNvPr id="45" name="Rectangle 44"/>
+          <p:cNvSpPr/>
+          <p:nvPr/>
+        </p:nvSpPr>
+        <p:spPr>
+          <a:xfrm>
+            <a:off x="6217920" y="4846320"/>
+            <a:ext cx="5120640" cy="822960"/>
+          </a:xfrm>
+          <a:prstGeom prst="rect">
+            <a:avLst/>
+          </a:prstGeom>
+          <a:solidFill>
+            <a:srgbClr val="FFFFFF"/>
+          </a:solidFill>
+          <a:ln w="12700">
+            <a:solidFill>
+              <a:srgbClr val="C8D4EE"/>
+            </a:solidFill>
+          </a:ln>
+          <a:effectLst/>
+        </p:spPr>
+        <p:style>
+          <a:lnRef idx="1">
+            <a:schemeClr val="accent1"/>
+          </a:lnRef>
+          <a:fillRef idx="3">
+            <a:schemeClr val="accent1"/>
+          </a:fillRef>
+          <a:effectRef idx="2">
+            <a:schemeClr val="accent1"/>
+          </a:effectRef>
+          <a:fontRef idx="minor">
+            <a:schemeClr val="lt1"/>
+          </a:fontRef>
+        </p:style>
+        <p:txBody>
+          <a:bodyPr rtlCol="0" anchor="ctr"/>
+          <a:lstStyle/>
+          <a:p>
+            <a:pPr algn="ctr"/>
+          </a:p>
+        </p:txBody>
+      </p:sp>
+      <p:sp>
+        <p:nvSpPr>
+          <p:cNvPr id="46" name="Rectangle 45"/>
+          <p:cNvSpPr/>
+          <p:nvPr/>
+        </p:nvSpPr>
+        <p:spPr>
+          <a:xfrm>
+            <a:off x="6217920" y="4846320"/>
+            <a:ext cx="73152" cy="822960"/>
+          </a:xfrm>
+          <a:prstGeom prst="rect">
+            <a:avLst/>
+          </a:prstGeom>
+          <a:solidFill>
+            <a:srgbClr val="3366CC"/>
+          </a:solidFill>
+          <a:ln>
+            <a:noFill/>
+          </a:ln>
+          <a:effectLst/>
+        </p:spPr>
+        <p:style>
+          <a:lnRef idx="1">
+            <a:schemeClr val="accent1"/>
+          </a:lnRef>
+          <a:fillRef idx="3">
+            <a:schemeClr val="accent1"/>
+          </a:fillRef>
+          <a:effectRef idx="2">
+            <a:schemeClr val="accent1"/>
+          </a:effectRef>
+          <a:fontRef idx="minor">
+            <a:schemeClr val="lt1"/>
+          </a:fontRef>
+        </p:style>
+        <p:txBody>
+          <a:bodyPr rtlCol="0" anchor="ctr"/>
+          <a:lstStyle/>
+          <a:p>
+            <a:pPr algn="ctr"/>
+          </a:p>
+        </p:txBody>
+      </p:sp>
+      <p:sp>
+        <p:nvSpPr>
+          <p:cNvPr id="47" name="TextBox 46"/>
           <p:cNvSpPr txBox="1"/>
           <p:nvPr/>
         </p:nvSpPr>
         <p:spPr>
           <a:xfrm>
-            <a:off x="502920" y="6437376"/>
-            <a:ext cx="8686800" cy="256032"/>
+            <a:off x="6400800" y="4956048"/>
+            <a:ext cx="2194560" cy="320040"/>
           </a:xfrm>
           <a:prstGeom prst="rect">
             <a:avLst/>
@@ -12186,27 +14232,27 @@
               </a:spcAft>
             </a:pPr>
             <a:r>
-              <a:rPr sz="900" b="0" i="0">
+              <a:rPr sz="1000" b="1" i="0">
                 <a:solidFill>
                   <a:srgbClr val="555555"/>
                 </a:solidFill>
                 <a:latin typeface="Segoe UI"/>
               </a:rPr>
-              <a:t>MACSE603 - Visual Analytics Lab  |  Smart Energy Consumption Visualization Dashboard Using Power BI &amp; IoT Pipelines</a:t>
-            </a:r>
-          </a:p>
-        </p:txBody>
-      </p:sp>
-      <p:sp>
-        <p:nvSpPr>
-          <p:cNvPr id="51" name="TextBox 50"/>
+              <a:t>Dual Delivery Serving</a:t>
+            </a:r>
+          </a:p>
+        </p:txBody>
+      </p:sp>
+      <p:sp>
+        <p:nvSpPr>
+          <p:cNvPr id="48" name="TextBox 47"/>
           <p:cNvSpPr txBox="1"/>
           <p:nvPr/>
         </p:nvSpPr>
         <p:spPr>
           <a:xfrm>
-            <a:off x="11064240" y="6437376"/>
-            <a:ext cx="640080" cy="256032"/>
+            <a:off x="6400800" y="5230368"/>
+            <a:ext cx="2194560" cy="365760"/>
           </a:xfrm>
           <a:prstGeom prst="rect">
             <a:avLst/>
@@ -12219,6 +14265,132 @@
           </a:bodyPr>
           <a:lstStyle/>
           <a:p>
+            <a:pPr algn="l">
+              <a:lnSpc>
+                <a:spcPct val="115000"/>
+              </a:lnSpc>
+              <a:spcAft>
+                <a:spcPts val="600"/>
+              </a:spcAft>
+            </a:pPr>
+            <a:r>
+              <a:rPr sz="1600" b="1" i="0">
+                <a:solidFill>
+                  <a:srgbClr val="10245C"/>
+                </a:solidFill>
+                <a:latin typeface="Segoe UI"/>
+              </a:rPr>
+              <a:t>Cloud &amp; Native</a:t>
+            </a:r>
+          </a:p>
+        </p:txBody>
+      </p:sp>
+      <p:sp>
+        <p:nvSpPr>
+          <p:cNvPr id="49" name="TextBox 48"/>
+          <p:cNvSpPr txBox="1"/>
+          <p:nvPr/>
+        </p:nvSpPr>
+        <p:spPr>
+          <a:xfrm>
+            <a:off x="8686800" y="5029200"/>
+            <a:ext cx="2514600" cy="548640"/>
+          </a:xfrm>
+          <a:prstGeom prst="rect">
+            <a:avLst/>
+          </a:prstGeom>
+          <a:noFill/>
+        </p:spPr>
+        <p:txBody>
+          <a:bodyPr wrap="square" lIns="0" rIns="0" tIns="0" bIns="0">
+            <a:spAutoFit/>
+          </a:bodyPr>
+          <a:lstStyle/>
+          <a:p>
+            <a:pPr algn="l">
+              <a:lnSpc>
+                <a:spcPct val="110000"/>
+              </a:lnSpc>
+              <a:spcAft>
+                <a:spcPts val="600"/>
+              </a:spcAft>
+            </a:pPr>
+            <a:r>
+              <a:rPr sz="950" b="0" i="0">
+                <a:solidFill>
+                  <a:srgbClr val="1C1C1C"/>
+                </a:solidFill>
+                <a:latin typeface="Segoe UI"/>
+              </a:rPr>
+              <a:t>Power BI Desktop (.pbip) &amp; Vercel Web Dashboard (ECharts)</a:t>
+            </a:r>
+          </a:p>
+        </p:txBody>
+      </p:sp>
+      <p:sp>
+        <p:nvSpPr>
+          <p:cNvPr id="50" name="TextBox 49"/>
+          <p:cNvSpPr txBox="1"/>
+          <p:nvPr/>
+        </p:nvSpPr>
+        <p:spPr>
+          <a:xfrm>
+            <a:off x="502920" y="6437376"/>
+            <a:ext cx="8686800" cy="256032"/>
+          </a:xfrm>
+          <a:prstGeom prst="rect">
+            <a:avLst/>
+          </a:prstGeom>
+          <a:noFill/>
+        </p:spPr>
+        <p:txBody>
+          <a:bodyPr wrap="square" lIns="0" rIns="0" tIns="0" bIns="0">
+            <a:spAutoFit/>
+          </a:bodyPr>
+          <a:lstStyle/>
+          <a:p>
+            <a:pPr algn="l">
+              <a:lnSpc>
+                <a:spcPct val="115000"/>
+              </a:lnSpc>
+              <a:spcAft>
+                <a:spcPts val="600"/>
+              </a:spcAft>
+            </a:pPr>
+            <a:r>
+              <a:rPr sz="900" b="0" i="0">
+                <a:solidFill>
+                  <a:srgbClr val="555555"/>
+                </a:solidFill>
+                <a:latin typeface="Segoe UI"/>
+              </a:rPr>
+              <a:t>MACSE603 - Visual Analytics Lab  |  Smart Energy Consumption Visualization Dashboard Using Power BI &amp; IoT Pipelines</a:t>
+            </a:r>
+          </a:p>
+        </p:txBody>
+      </p:sp>
+      <p:sp>
+        <p:nvSpPr>
+          <p:cNvPr id="51" name="TextBox 50"/>
+          <p:cNvSpPr txBox="1"/>
+          <p:nvPr/>
+        </p:nvSpPr>
+        <p:spPr>
+          <a:xfrm>
+            <a:off x="11064240" y="6437376"/>
+            <a:ext cx="640080" cy="256032"/>
+          </a:xfrm>
+          <a:prstGeom prst="rect">
+            <a:avLst/>
+          </a:prstGeom>
+          <a:noFill/>
+        </p:spPr>
+        <p:txBody>
+          <a:bodyPr wrap="square" lIns="0" rIns="0" tIns="0" bIns="0">
+            <a:spAutoFit/>
+          </a:bodyPr>
+          <a:lstStyle/>
+          <a:p>
             <a:pPr algn="r">
               <a:lnSpc>
                 <a:spcPct val="115000"/>
@@ -12234,7 +14406,7 @@
                 </a:solidFill>
                 <a:latin typeface="Segoe UI"/>
               </a:rPr>
-              <a:t>15</a:t>
+              <a:t>17</a:t>
             </a:r>
           </a:p>
         </p:txBody>

--- a/Team_VisualAnalytics_SmartEnergy_PowerBI_v3.pptx
+++ b/Team_VisualAnalytics_SmartEnergy_PowerBI_v3.pptx
@@ -3572,7 +3572,7 @@
                 </a:solidFill>
                 <a:latin typeface="Segoe UI"/>
               </a:rPr>
-              <a:t>SUBMITTED TO / EVALUATOR:</a:t>
+              <a:t>SUBMITTED TO / FACULTY EVALUATOR &amp; GUIDE:</a:t>
             </a:r>
           </a:p>
           <a:p>
@@ -3591,7 +3591,7 @@
                 </a:solidFill>
                 <a:latin typeface="Segoe UI"/>
               </a:rPr>
-              <a:t>Dr. Mary Jennifer J  |  Assistant Professor (Senior), School of Social Sciences &amp; Languages (SSL) / Evaluator</a:t>
+              <a:t>Dr. MANIKANDAN K  |  Professor Grade 2, Department of Database Systems</a:t>
             </a:r>
           </a:p>
           <a:p>
@@ -3610,7 +3610,7 @@
                 </a:solidFill>
                 <a:latin typeface="Segoe UI"/>
               </a:rPr>
-              <a:t>School of Computer Science and Engineering (SCOPE), Vellore Institute of Technology, Vellore - 632014</a:t>
+              <a:t>School of Computer Science and Engineering (SCOPE), VIT Vellore (Cabin: SJT 411 A29 • Email: kmanikandan@vit.ac.in)</a:t>
             </a:r>
           </a:p>
         </p:txBody>
